--- a/docs/pptx/Ch10_P5_Exceptions_JUnit5.pptx
+++ b/docs/pptx/Ch10_P5_Exceptions_JUnit5.pptx
@@ -11,9 +11,10 @@
     <p:sldId id="259" r:id="rId5"/>
     <p:sldId id="260" r:id="rId6"/>
     <p:sldId id="261" r:id="rId7"/>
+    <p:sldId id="262" r:id="rId8"/>
   </p:sldIdLst>
   <p:notesMasterIdLst>
-    <p:notesMasterId r:id="rId8"/>
+    <p:notesMasterId r:id="rId9"/>
   </p:notesMasterIdLst>
   <p:sldSz cx="9144000" cy="5143500"/>
   <p:notesSz cx="5143500" cy="9144000"/>
@@ -507,7 +508,10 @@
           <a:p>
             <a:r>
               <a:rPr lang="en-US" dirty="0"/>
-              <a:t/>
+              <a:t>TITRE: Exceptions &amp; Tests JUnit 5
+Critère: Critère P5 — Error handling et tests
+Objectif de cette présentation : couvrir les concepts clés pour le critère Critère P5 — Error handling et tests.
+Durée estimée : 1h30 à 2h avec exercices.</a:t>
             </a:r>
             <a:endParaRPr lang="en-US" dirty="0"/>
           </a:p>
@@ -595,7 +599,10 @@
           <a:p>
             <a:r>
               <a:rPr lang="en-US" dirty="0"/>
-              <a:t/>
+              <a:t>PROF: Commencer par demander : 'Pourquoi tester ?' 
+Analogie : les crash-tests automobiles — on ne livre pas une voiture sans la tester.
+Statistique : le coût de correction d'un bug augmente x10 à chaque phase (conception → développement → production).
+Hiérarchie des tests : unitaires → intégration → système → acceptation.</a:t>
             </a:r>
             <a:endParaRPr lang="en-US" dirty="0"/>
           </a:p>
@@ -683,7 +690,11 @@
           <a:p>
             <a:r>
               <a:rPr lang="en-US" dirty="0"/>
-              <a:t/>
+              <a:t>PROF: Coder en live :
+1. Division par zéro sans try-catch → crash
+2. Ajouter try-catch → message d'erreur propre
+3. Ajouter finally → 'Fin du calcul' toujours affiché
+Exercice : écrire un programme de saisie d'âge avec try-catch pour InputMismatchException.</a:t>
             </a:r>
             <a:endParaRPr lang="en-US" dirty="0"/>
           </a:p>
@@ -771,7 +782,16 @@
           <a:p>
             <a:r>
               <a:rPr lang="en-US" dirty="0"/>
-              <a:t/>
+              <a:t>PROF: Dessiner l'arbre d'héritage :
+Throwable
+├── Error (pas à catcher : OutOfMemoryError)
+└── Exception
+    ├── IOException (Checked)
+    ├── FileNotFoundException (Checked)
+    └── RuntimeException (Unchecked)
+        ├── NullPointerException
+        ├── ArrayIndexOutOfBoundsException
+        └── IllegalArgumentException</a:t>
             </a:r>
             <a:endParaRPr lang="en-US" dirty="0"/>
           </a:p>
@@ -859,7 +879,17 @@
           <a:p>
             <a:r>
               <a:rPr lang="en-US" dirty="0"/>
-              <a:t/>
+              <a:t>PROF: ATTENTION : JUnit 5 Jupiter, PAS JUnit 4.
+Imports corrects :
+import org.junit.jupiter.api.Test;
+import org.junit.jupiter.api.BeforeEach;
+import static org.junit.jupiter.api.Assertions.*;
+Coder un test complet en live :
+1. Créer GestionStockTest
+2. @BeforeEach pour initialiser
+3. @Test testAjouter avec assertEquals
+4. @Test testSupprimerVide avec assertThrows
+Maven dependency : junit-jupiter 5.x scope test.</a:t>
             </a:r>
             <a:endParaRPr lang="en-US" dirty="0"/>
           </a:p>
@@ -947,7 +977,17 @@
           <a:p>
             <a:r>
               <a:rPr lang="en-US" dirty="0"/>
-              <a:t/>
+              <a:t>PROF: Le pattern AAA est la structure de TOUT bon test.
+Exemple :
+// Arrange
+GestionStock gs = new GestionStock();
+Produit p = new Produit('Clavier', 29.99);
+// Act
+gs.ajouter(p);
+// Assert
+assertEquals(1, gs.getTaille());
+assertEquals('Clavier', gs.getProduit(0).getNom());
+Faire écrire 3 tests aux étudiants en suivant le pattern AAA.</a:t>
             </a:r>
             <a:endParaRPr lang="en-US" dirty="0"/>
           </a:p>
@@ -971,6 +1011,95 @@
             <a:fld id="{F7021451-1387-4CA6-816F-3879F97B5CBC}" type="slidenum">
               <a:rPr lang="en-US"/>
               <a:t>6</a:t>
+            </a:fld>
+            <a:endParaRPr lang="en-US"/>
+          </a:p>
+        </p:txBody>
+      </p:sp>
+    </p:spTree>
+    <p:extLst>
+      <p:ext uri="{BB962C8B-B14F-4D97-AF65-F5344CB8AC3E}">
+        <p14:creationId xmlns:p14="http://schemas.microsoft.com/office/powerpoint/2010/main" val="1024086991"/>
+      </p:ext>
+    </p:extLst>
+  </p:cSld>
+  <p:clrMapOvr>
+    <a:masterClrMapping/>
+  </p:clrMapOvr>
+</p:notes>
+</file>
+
+<file path=ppt/notesSlides/notesSlide7.xml><?xml version="1.0" encoding="utf-8"?>
+<p:notes xmlns:a="http://schemas.openxmlformats.org/drawingml/2006/main" xmlns:r="http://schemas.openxmlformats.org/officeDocument/2006/relationships" xmlns:p="http://schemas.openxmlformats.org/presentationml/2006/main">
+  <p:cSld>
+    <p:spTree>
+      <p:nvGrpSpPr>
+        <p:cNvPr id="1" name=""/>
+        <p:cNvGrpSpPr/>
+        <p:nvPr/>
+      </p:nvGrpSpPr>
+      <p:grpSpPr>
+        <a:xfrm>
+          <a:off x="0" y="0"/>
+          <a:ext cx="0" cy="0"/>
+          <a:chOff x="0" y="0"/>
+          <a:chExt cx="0" cy="0"/>
+        </a:xfrm>
+      </p:grpSpPr>
+      <p:sp>
+        <p:nvSpPr>
+          <p:cNvPr id="2" name="Slide Image Placeholder 1"/>
+          <p:cNvSpPr>
+            <a:spLocks noGrp="1" noRot="1" noChangeAspect="1"/>
+          </p:cNvSpPr>
+          <p:nvPr>
+            <p:ph type="sldImg"/>
+          </p:nvPr>
+        </p:nvSpPr>
+        <p:spPr/>
+      </p:sp>
+      <p:sp>
+        <p:nvSpPr>
+          <p:cNvPr id="3" name="Notes Placeholder 2"/>
+          <p:cNvSpPr>
+            <a:spLocks noGrp="1"/>
+          </p:cNvSpPr>
+          <p:nvPr>
+            <p:ph type="body" idx="1"/>
+          </p:nvPr>
+        </p:nvSpPr>
+        <p:spPr/>
+        <p:txBody>
+          <a:bodyPr/>
+          <a:lstStyle/>
+          <a:p>
+            <a:r>
+              <a:rPr lang="en-US" dirty="0"/>
+              <a:t>PROF: Devoir P5 : implémenter une classe avec 3 exceptions différentes + écrire 5 tests JUnit 5.
+Site : Monde 3 Ch10 → Puzzle de débogage + Code Builder JUnit.</a:t>
+            </a:r>
+            <a:endParaRPr lang="en-US" dirty="0"/>
+          </a:p>
+        </p:txBody>
+      </p:sp>
+      <p:sp>
+        <p:nvSpPr>
+          <p:cNvPr id="4" name="Slide Number Placeholder 3"/>
+          <p:cNvSpPr>
+            <a:spLocks noGrp="1"/>
+          </p:cNvSpPr>
+          <p:nvPr>
+            <p:ph type="sldNum" sz="quarter" idx="10"/>
+          </p:nvPr>
+        </p:nvSpPr>
+        <p:spPr/>
+        <p:txBody>
+          <a:bodyPr/>
+          <a:lstStyle/>
+          <a:p>
+            <a:fld id="{F7021451-1387-4CA6-816F-3879F97B5CBC}" type="slidenum">
+              <a:rPr lang="en-US"/>
+              <a:t>7</a:t>
             </a:fld>
             <a:endParaRPr lang="en-US"/>
           </a:p>
@@ -1302,7 +1431,7 @@
     <p:bg>
       <p:bgPr>
         <a:solidFill>
-          <a:srgbClr val="1B2A4A"/>
+          <a:srgbClr val="1A0D00"/>
         </a:solidFill>
       </p:bgPr>
     </p:bg>
@@ -1329,200 +1458,7 @@
         <p:spPr>
           <a:xfrm>
             <a:off x="0" y="0"/>
-            <a:ext cx="9144000" cy="1097280"/>
-          </a:xfrm>
-          <a:prstGeom prst="rect">
-            <a:avLst/>
-          </a:prstGeom>
-          <a:solidFill>
-            <a:srgbClr val="065A82"/>
-          </a:solidFill>
-          <a:ln/>
-        </p:spPr>
-      </p:sp>
-      <p:sp>
-        <p:nvSpPr>
-          <p:cNvPr id="3" name="Text 1"/>
-          <p:cNvSpPr/>
-          <p:nvPr/>
-        </p:nvSpPr>
-        <p:spPr>
-          <a:xfrm>
-            <a:off x="731520" y="137160"/>
-            <a:ext cx="2743200" cy="365760"/>
-          </a:xfrm>
-          <a:prstGeom prst="rect">
-            <a:avLst/>
-          </a:prstGeom>
-          <a:noFill/>
-          <a:ln/>
-        </p:spPr>
-        <p:txBody>
-          <a:bodyPr wrap="square" rtlCol="0" anchor="ctr"/>
-          <a:lstStyle/>
-          <a:p>
-            <a:pPr indent="0" marL="0">
-              <a:buNone/>
-            </a:pPr>
-            <a:r>
-              <a:rPr lang="en-US" sz="1400" b="1" dirty="0">
-                <a:solidFill>
-                  <a:srgbClr val="00A896"/>
-                </a:solidFill>
-                <a:latin typeface="Calibri" pitchFamily="34" charset="0"/>
-                <a:ea typeface="Calibri" pitchFamily="34" charset="-122"/>
-                <a:cs typeface="Calibri" pitchFamily="34" charset="-120"/>
-              </a:rPr>
-              <a:t>MONDE 3</a:t>
-            </a:r>
-            <a:endParaRPr lang="en-US" sz="1400" dirty="0"/>
-          </a:p>
-        </p:txBody>
-      </p:sp>
-      <p:sp>
-        <p:nvSpPr>
-          <p:cNvPr id="4" name="Text 2"/>
-          <p:cNvSpPr/>
-          <p:nvPr/>
-        </p:nvSpPr>
-        <p:spPr>
-          <a:xfrm>
-            <a:off x="731520" y="457200"/>
-            <a:ext cx="7315200" cy="457200"/>
-          </a:xfrm>
-          <a:prstGeom prst="rect">
-            <a:avLst/>
-          </a:prstGeom>
-          <a:noFill/>
-          <a:ln/>
-        </p:spPr>
-        <p:txBody>
-          <a:bodyPr wrap="square" rtlCol="0" anchor="ctr"/>
-          <a:lstStyle/>
-          <a:p>
-            <a:pPr indent="0" marL="0">
-              <a:buNone/>
-            </a:pPr>
-            <a:r>
-              <a:rPr lang="en-US" sz="1200" dirty="0">
-                <a:solidFill>
-                  <a:srgbClr val="E2E8F0"/>
-                </a:solidFill>
-                <a:latin typeface="Calibri" pitchFamily="34" charset="0"/>
-                <a:ea typeface="Calibri" pitchFamily="34" charset="-122"/>
-                <a:cs typeface="Calibri" pitchFamily="34" charset="-120"/>
-              </a:rPr>
-              <a:t>UNIT 19 : Data Structures &amp; Algorithms</a:t>
-            </a:r>
-            <a:endParaRPr lang="en-US" sz="1200" dirty="0"/>
-          </a:p>
-        </p:txBody>
-      </p:sp>
-      <p:sp>
-        <p:nvSpPr>
-          <p:cNvPr id="5" name="Text 3"/>
-          <p:cNvSpPr/>
-          <p:nvPr/>
-        </p:nvSpPr>
-        <p:spPr>
-          <a:xfrm>
-            <a:off x="731520" y="1645920"/>
-            <a:ext cx="7315200" cy="640080"/>
-          </a:xfrm>
-          <a:prstGeom prst="rect">
-            <a:avLst/>
-          </a:prstGeom>
-          <a:noFill/>
-          <a:ln/>
-        </p:spPr>
-        <p:txBody>
-          <a:bodyPr wrap="square" rtlCol="0" anchor="ctr"/>
-          <a:lstStyle/>
-          <a:p>
-            <a:pPr indent="0" marL="0">
-              <a:buNone/>
-            </a:pPr>
-            <a:r>
-              <a:rPr lang="en-US" sz="4400" b="1" dirty="0">
-                <a:solidFill>
-                  <a:srgbClr val="FFFFFF"/>
-                </a:solidFill>
-                <a:latin typeface="Trebuchet MS" pitchFamily="34" charset="0"/>
-                <a:ea typeface="Trebuchet MS" pitchFamily="34" charset="-122"/>
-                <a:cs typeface="Trebuchet MS" pitchFamily="34" charset="-120"/>
-              </a:rPr>
-              <a:t>Chapitre 10</a:t>
-            </a:r>
-            <a:endParaRPr lang="en-US" sz="4400" dirty="0"/>
-          </a:p>
-        </p:txBody>
-      </p:sp>
-      <p:sp>
-        <p:nvSpPr>
-          <p:cNvPr id="6" name="Text 4"/>
-          <p:cNvSpPr/>
-          <p:nvPr/>
-        </p:nvSpPr>
-        <p:spPr>
-          <a:xfrm>
-            <a:off x="731520" y="2286000"/>
-            <a:ext cx="7315200" cy="1097280"/>
-          </a:xfrm>
-          <a:prstGeom prst="rect">
-            <a:avLst/>
-          </a:prstGeom>
-          <a:noFill/>
-          <a:ln/>
-        </p:spPr>
-        <p:txBody>
-          <a:bodyPr wrap="square" rtlCol="0" anchor="ctr"/>
-          <a:lstStyle/>
-          <a:p>
-            <a:pPr indent="0" marL="0">
-              <a:buNone/>
-            </a:pPr>
-            <a:r>
-              <a:rPr lang="en-US" sz="3000" b="1" dirty="0">
-                <a:solidFill>
-                  <a:srgbClr val="00A896"/>
-                </a:solidFill>
-                <a:latin typeface="Trebuchet MS" pitchFamily="34" charset="0"/>
-                <a:ea typeface="Trebuchet MS" pitchFamily="34" charset="-122"/>
-                <a:cs typeface="Trebuchet MS" pitchFamily="34" charset="-120"/>
-              </a:rPr>
-              <a:t>Gestion des exceptions</a:t>
-            </a:r>
-            <a:endParaRPr lang="en-US" sz="3000" dirty="0"/>
-          </a:p>
-          <a:p>
-            <a:pPr indent="0" marL="0">
-              <a:buNone/>
-            </a:pPr>
-            <a:r>
-              <a:rPr lang="en-US" sz="3000" b="1" dirty="0">
-                <a:solidFill>
-                  <a:srgbClr val="00A896"/>
-                </a:solidFill>
-                <a:latin typeface="Trebuchet MS" pitchFamily="34" charset="0"/>
-                <a:ea typeface="Trebuchet MS" pitchFamily="34" charset="-122"/>
-                <a:cs typeface="Trebuchet MS" pitchFamily="34" charset="-120"/>
-              </a:rPr>
-              <a:t>et Tests JUnit 5</a:t>
-            </a:r>
-            <a:endParaRPr lang="en-US" sz="3000" dirty="0"/>
-          </a:p>
-        </p:txBody>
-      </p:sp>
-      <p:sp>
-        <p:nvSpPr>
-          <p:cNvPr id="7" name="Shape 5"/>
-          <p:cNvSpPr/>
-          <p:nvPr/>
-        </p:nvSpPr>
-        <p:spPr>
-          <a:xfrm>
-            <a:off x="731520" y="3657600"/>
-            <a:ext cx="2286000" cy="54864"/>
+            <a:ext cx="9144000" cy="73152"/>
           </a:xfrm>
           <a:prstGeom prst="rect">
             <a:avLst/>
@@ -1535,14 +1471,14 @@
       </p:sp>
       <p:sp>
         <p:nvSpPr>
-          <p:cNvPr id="8" name="Text 6"/>
+          <p:cNvPr id="3" name="Text 1"/>
           <p:cNvSpPr/>
           <p:nvPr/>
         </p:nvSpPr>
         <p:spPr>
           <a:xfrm>
-            <a:off x="731520" y="3840480"/>
-            <a:ext cx="7315200" cy="731520"/>
+            <a:off x="548640" y="365760"/>
+            <a:ext cx="2743200" cy="365760"/>
           </a:xfrm>
           <a:prstGeom prst="rect">
             <a:avLst/>
@@ -1558,19 +1494,195 @@
               <a:buNone/>
             </a:pPr>
             <a:r>
-              <a:rPr lang="en-US" sz="1300" i="1" dirty="0">
-                <a:solidFill>
-                  <a:srgbClr val="E2E8F0"/>
+              <a:rPr lang="en-US" sz="1200" b="1" spc="400" kern="0" dirty="0">
+                <a:solidFill>
+                  <a:srgbClr val="F97316"/>
                 </a:solidFill>
                 <a:latin typeface="Calibri" pitchFamily="34" charset="0"/>
                 <a:ea typeface="Calibri" pitchFamily="34" charset="-122"/>
                 <a:cs typeface="Calibri" pitchFamily="34" charset="-120"/>
               </a:rPr>
-              <a:t>P5</a:t>
+              <a:t>MONDE 3</a:t>
+            </a:r>
+            <a:endParaRPr lang="en-US" sz="1200" dirty="0"/>
+          </a:p>
+        </p:txBody>
+      </p:sp>
+      <p:sp>
+        <p:nvSpPr>
+          <p:cNvPr id="4" name="Text 2"/>
+          <p:cNvSpPr/>
+          <p:nvPr/>
+        </p:nvSpPr>
+        <p:spPr>
+          <a:xfrm>
+            <a:off x="548640" y="731520"/>
+            <a:ext cx="7315200" cy="365760"/>
+          </a:xfrm>
+          <a:prstGeom prst="rect">
+            <a:avLst/>
+          </a:prstGeom>
+          <a:noFill/>
+          <a:ln/>
+        </p:spPr>
+        <p:txBody>
+          <a:bodyPr wrap="square" rtlCol="0" anchor="ctr"/>
+          <a:lstStyle/>
+          <a:p>
+            <a:pPr indent="0" marL="0">
+              <a:buNone/>
+            </a:pPr>
+            <a:r>
+              <a:rPr lang="en-US" sz="1100" dirty="0">
+                <a:solidFill>
+                  <a:srgbClr val="94A3B8"/>
+                </a:solidFill>
+                <a:latin typeface="Calibri" pitchFamily="34" charset="0"/>
+                <a:ea typeface="Calibri" pitchFamily="34" charset="-122"/>
+                <a:cs typeface="Calibri" pitchFamily="34" charset="-120"/>
+              </a:rPr>
+              <a:t>UNIT 19 : Data Structures &amp; Algorithms</a:t>
+            </a:r>
+            <a:endParaRPr lang="en-US" sz="1100" dirty="0"/>
+          </a:p>
+        </p:txBody>
+      </p:sp>
+      <p:sp>
+        <p:nvSpPr>
+          <p:cNvPr id="5" name="Text 3"/>
+          <p:cNvSpPr/>
+          <p:nvPr/>
+        </p:nvSpPr>
+        <p:spPr>
+          <a:xfrm>
+            <a:off x="548640" y="1371600"/>
+            <a:ext cx="8229600" cy="457200"/>
+          </a:xfrm>
+          <a:prstGeom prst="rect">
+            <a:avLst/>
+          </a:prstGeom>
+          <a:noFill/>
+          <a:ln/>
+        </p:spPr>
+        <p:txBody>
+          <a:bodyPr wrap="square" rtlCol="0" anchor="ctr"/>
+          <a:lstStyle/>
+          <a:p>
+            <a:pPr indent="0" marL="0">
+              <a:buNone/>
+            </a:pPr>
+            <a:r>
+              <a:rPr lang="en-US" sz="1400" b="1" dirty="0">
+                <a:solidFill>
+                  <a:srgbClr val="F97316"/>
+                </a:solidFill>
+                <a:latin typeface="Calibri" pitchFamily="34" charset="0"/>
+                <a:ea typeface="Calibri" pitchFamily="34" charset="-122"/>
+                <a:cs typeface="Calibri" pitchFamily="34" charset="-120"/>
+              </a:rPr>
+              <a:t>Chapitre 10</a:t>
+            </a:r>
+            <a:endParaRPr lang="en-US" sz="1400" dirty="0"/>
+          </a:p>
+        </p:txBody>
+      </p:sp>
+      <p:sp>
+        <p:nvSpPr>
+          <p:cNvPr id="6" name="Text 4"/>
+          <p:cNvSpPr/>
+          <p:nvPr/>
+        </p:nvSpPr>
+        <p:spPr>
+          <a:xfrm>
+            <a:off x="548640" y="2011680"/>
+            <a:ext cx="8229600" cy="1371600"/>
+          </a:xfrm>
+          <a:prstGeom prst="rect">
+            <a:avLst/>
+          </a:prstGeom>
+          <a:noFill/>
+          <a:ln/>
+        </p:spPr>
+        <p:txBody>
+          <a:bodyPr wrap="square" rtlCol="0" anchor="ctr"/>
+          <a:lstStyle/>
+          <a:p>
+            <a:pPr indent="0" marL="0">
+              <a:buNone/>
+            </a:pPr>
+            <a:r>
+              <a:rPr lang="en-US" sz="3600" b="1" dirty="0">
+                <a:solidFill>
+                  <a:srgbClr val="FFFFFF"/>
+                </a:solidFill>
+                <a:latin typeface="Calibri" pitchFamily="34" charset="0"/>
+                <a:ea typeface="Calibri" pitchFamily="34" charset="-122"/>
+                <a:cs typeface="Calibri" pitchFamily="34" charset="-120"/>
+              </a:rPr>
+              <a:t>Exceptions &amp; Tests JUnit 5</a:t>
+            </a:r>
+            <a:endParaRPr lang="en-US" sz="3600" dirty="0"/>
+          </a:p>
+        </p:txBody>
+      </p:sp>
+      <p:sp>
+        <p:nvSpPr>
+          <p:cNvPr id="7" name="Text 5"/>
+          <p:cNvSpPr/>
+          <p:nvPr/>
+        </p:nvSpPr>
+        <p:spPr>
+          <a:xfrm>
+            <a:off x="548640" y="3657600"/>
+            <a:ext cx="8229600" cy="365760"/>
+          </a:xfrm>
+          <a:prstGeom prst="rect">
+            <a:avLst/>
+          </a:prstGeom>
+          <a:noFill/>
+          <a:ln/>
+        </p:spPr>
+        <p:txBody>
+          <a:bodyPr wrap="square" rtlCol="0" anchor="ctr"/>
+          <a:lstStyle/>
+          <a:p>
+            <a:pPr indent="0" marL="0">
+              <a:buNone/>
+            </a:pPr>
+            <a:r>
+              <a:rPr lang="en-US" sz="1300" dirty="0">
+                <a:solidFill>
+                  <a:srgbClr val="94A3B8"/>
+                </a:solidFill>
+                <a:latin typeface="Calibri" pitchFamily="34" charset="0"/>
+                <a:ea typeface="Calibri" pitchFamily="34" charset="-122"/>
+                <a:cs typeface="Calibri" pitchFamily="34" charset="-120"/>
+              </a:rPr>
+              <a:t>Critère P5 — Error handling et tests</a:t>
             </a:r>
             <a:endParaRPr lang="en-US" sz="1300" dirty="0"/>
           </a:p>
         </p:txBody>
+      </p:sp>
+      <p:sp>
+        <p:nvSpPr>
+          <p:cNvPr id="8" name="Shape 6"/>
+          <p:cNvSpPr/>
+          <p:nvPr/>
+        </p:nvSpPr>
+        <p:spPr>
+          <a:xfrm>
+            <a:off x="0" y="5074920"/>
+            <a:ext cx="9144000" cy="73152"/>
+          </a:xfrm>
+          <a:prstGeom prst="rect">
+            <a:avLst/>
+          </a:prstGeom>
+          <a:solidFill>
+            <a:srgbClr val="F97316"/>
+          </a:solidFill>
+          <a:ln/>
+        </p:spPr>
       </p:sp>
     </p:spTree>
   </p:cSld>
@@ -1586,7 +1698,7 @@
     <p:bg>
       <p:bgPr>
         <a:solidFill>
-          <a:srgbClr val="F8FAFC"/>
+          <a:srgbClr val="1A0D00"/>
         </a:solidFill>
       </p:bgPr>
     </p:bg>
@@ -1613,13 +1725,13 @@
         <p:spPr>
           <a:xfrm>
             <a:off x="0" y="0"/>
-            <a:ext cx="109728" cy="5143500"/>
+            <a:ext cx="9144000" cy="54864"/>
           </a:xfrm>
           <a:prstGeom prst="rect">
             <a:avLst/>
           </a:prstGeom>
           <a:solidFill>
-            <a:srgbClr val="DC2626"/>
+            <a:srgbClr val="F97316"/>
           </a:solidFill>
           <a:ln/>
         </p:spPr>
@@ -1632,7 +1744,7 @@
         </p:nvSpPr>
         <p:spPr>
           <a:xfrm>
-            <a:off x="457200" y="274320"/>
+            <a:off x="548640" y="274320"/>
             <a:ext cx="8229600" cy="548640"/>
           </a:xfrm>
           <a:prstGeom prst="rect">
@@ -1649,17 +1761,17 @@
               <a:buNone/>
             </a:pPr>
             <a:r>
-              <a:rPr lang="en-US" sz="2600" b="1" dirty="0">
-                <a:solidFill>
-                  <a:srgbClr val="1B2A4A"/>
-                </a:solidFill>
-                <a:latin typeface="Trebuchet MS" pitchFamily="34" charset="0"/>
-                <a:ea typeface="Trebuchet MS" pitchFamily="34" charset="-122"/>
-                <a:cs typeface="Trebuchet MS" pitchFamily="34" charset="-120"/>
-              </a:rPr>
-              <a:t>Les exceptions Java : hiérarchie</a:t>
-            </a:r>
-            <a:endParaRPr lang="en-US" sz="2600" dirty="0"/>
+              <a:rPr lang="en-US" sz="2400" b="1" dirty="0">
+                <a:solidFill>
+                  <a:srgbClr val="FFFFFF"/>
+                </a:solidFill>
+                <a:latin typeface="Calibri" pitchFamily="34" charset="0"/>
+                <a:ea typeface="Calibri" pitchFamily="34" charset="-122"/>
+                <a:cs typeface="Calibri" pitchFamily="34" charset="-120"/>
+              </a:rPr>
+              <a:t>Objectifs des Tests</a:t>
+            </a:r>
+            <a:endParaRPr lang="en-US" sz="2400" dirty="0"/>
           </a:p>
         </p:txBody>
       </p:sp>
@@ -1671,8 +1783,8 @@
         </p:nvSpPr>
         <p:spPr>
           <a:xfrm>
-            <a:off x="640080" y="1005840"/>
-            <a:ext cx="7772400" cy="457200"/>
+            <a:off x="548640" y="1005840"/>
+            <a:ext cx="8046720" cy="3657600"/>
           </a:xfrm>
           <a:prstGeom prst="rect">
             <a:avLst/>
@@ -1681,223 +1793,110 @@
           <a:ln/>
         </p:spPr>
         <p:txBody>
-          <a:bodyPr wrap="square" rtlCol="0" anchor="ctr"/>
+          <a:bodyPr wrap="square" rtlCol="0" anchor="t"/>
           <a:lstStyle/>
           <a:p>
             <a:pPr marL="342900" indent="-342900">
+              <a:lnSpc>
+                <a:spcPct val="130000"/>
+              </a:lnSpc>
               <a:buSzPct val="100000"/>
               <a:buChar char="•"/>
             </a:pPr>
             <a:r>
               <a:rPr lang="en-US" sz="1400" dirty="0">
                 <a:solidFill>
-                  <a:srgbClr val="334155"/>
+                  <a:srgbClr val="E2E8F0"/>
                 </a:solidFill>
                 <a:latin typeface="Calibri" pitchFamily="34" charset="0"/>
                 <a:ea typeface="Calibri" pitchFamily="34" charset="-122"/>
                 <a:cs typeface="Calibri" pitchFamily="34" charset="-120"/>
               </a:rPr>
-              <a:t>Throwable → Error (irrécupérable : OutOfMemoryError) + Exception</a:t>
+              <a:t>Fiabilité : identifier et corriger les bugs</a:t>
             </a:r>
             <a:endParaRPr lang="en-US" sz="1400" dirty="0"/>
           </a:p>
-        </p:txBody>
-      </p:sp>
-      <p:sp>
-        <p:nvSpPr>
-          <p:cNvPr id="5" name="Text 3"/>
-          <p:cNvSpPr/>
-          <p:nvPr/>
-        </p:nvSpPr>
-        <p:spPr>
-          <a:xfrm>
-            <a:off x="640080" y="1554480"/>
-            <a:ext cx="7772400" cy="457200"/>
-          </a:xfrm>
-          <a:prstGeom prst="rect">
-            <a:avLst/>
-          </a:prstGeom>
-          <a:noFill/>
-          <a:ln/>
-        </p:spPr>
-        <p:txBody>
-          <a:bodyPr wrap="square" rtlCol="0" anchor="ctr"/>
-          <a:lstStyle/>
           <a:p>
             <a:pPr marL="342900" indent="-342900">
+              <a:lnSpc>
+                <a:spcPct val="130000"/>
+              </a:lnSpc>
               <a:buSzPct val="100000"/>
               <a:buChar char="•"/>
             </a:pPr>
             <a:r>
               <a:rPr lang="en-US" sz="1400" dirty="0">
                 <a:solidFill>
-                  <a:srgbClr val="334155"/>
+                  <a:srgbClr val="E2E8F0"/>
                 </a:solidFill>
                 <a:latin typeface="Calibri" pitchFamily="34" charset="0"/>
                 <a:ea typeface="Calibri" pitchFamily="34" charset="-122"/>
                 <a:cs typeface="Calibri" pitchFamily="34" charset="-120"/>
               </a:rPr>
-              <a:t>Exception → Checked (IOException, FileNotFoundException) : OBLIGATOIRE de gérer</a:t>
+              <a:t>Sécurité : identifier les vulnérabilités</a:t>
             </a:r>
             <a:endParaRPr lang="en-US" sz="1400" dirty="0"/>
           </a:p>
-        </p:txBody>
-      </p:sp>
-      <p:sp>
-        <p:nvSpPr>
-          <p:cNvPr id="6" name="Text 4"/>
-          <p:cNvSpPr/>
-          <p:nvPr/>
-        </p:nvSpPr>
-        <p:spPr>
-          <a:xfrm>
-            <a:off x="640080" y="2103120"/>
-            <a:ext cx="7772400" cy="457200"/>
-          </a:xfrm>
-          <a:prstGeom prst="rect">
-            <a:avLst/>
-          </a:prstGeom>
-          <a:noFill/>
-          <a:ln/>
-        </p:spPr>
-        <p:txBody>
-          <a:bodyPr wrap="square" rtlCol="0" anchor="ctr"/>
-          <a:lstStyle/>
           <a:p>
             <a:pPr marL="342900" indent="-342900">
+              <a:lnSpc>
+                <a:spcPct val="130000"/>
+              </a:lnSpc>
               <a:buSzPct val="100000"/>
               <a:buChar char="•"/>
             </a:pPr>
             <a:r>
               <a:rPr lang="en-US" sz="1400" dirty="0">
                 <a:solidFill>
-                  <a:srgbClr val="334155"/>
+                  <a:srgbClr val="E2E8F0"/>
                 </a:solidFill>
                 <a:latin typeface="Calibri" pitchFamily="34" charset="0"/>
                 <a:ea typeface="Calibri" pitchFamily="34" charset="-122"/>
                 <a:cs typeface="Calibri" pitchFamily="34" charset="-120"/>
               </a:rPr>
-              <a:t>Exception → Unchecked/RuntimeException (NullPointerException, ArrayIndexOutOfBounds) : optionnel</a:t>
+              <a:t>Performance : évaluer l'efficacité</a:t>
             </a:r>
             <a:endParaRPr lang="en-US" sz="1400" dirty="0"/>
           </a:p>
-        </p:txBody>
-      </p:sp>
-      <p:sp>
-        <p:nvSpPr>
-          <p:cNvPr id="7" name="Text 5"/>
-          <p:cNvSpPr/>
-          <p:nvPr/>
-        </p:nvSpPr>
-        <p:spPr>
-          <a:xfrm>
-            <a:off x="640080" y="2651760"/>
-            <a:ext cx="7772400" cy="457200"/>
-          </a:xfrm>
-          <a:prstGeom prst="rect">
-            <a:avLst/>
-          </a:prstGeom>
-          <a:noFill/>
-          <a:ln/>
-        </p:spPr>
-        <p:txBody>
-          <a:bodyPr wrap="square" rtlCol="0" anchor="ctr"/>
-          <a:lstStyle/>
           <a:p>
             <a:pPr marL="342900" indent="-342900">
+              <a:lnSpc>
+                <a:spcPct val="130000"/>
+              </a:lnSpc>
               <a:buSzPct val="100000"/>
               <a:buChar char="•"/>
             </a:pPr>
             <a:r>
               <a:rPr lang="en-US" sz="1400" dirty="0">
                 <a:solidFill>
-                  <a:srgbClr val="334155"/>
+                  <a:srgbClr val="E2E8F0"/>
                 </a:solidFill>
                 <a:latin typeface="Calibri" pitchFamily="34" charset="0"/>
                 <a:ea typeface="Calibri" pitchFamily="34" charset="-122"/>
                 <a:cs typeface="Calibri" pitchFamily="34" charset="-120"/>
               </a:rPr>
-              <a:t>throw new Exception("message") : LANCER une exception</a:t>
+              <a:t>Processus itératif : intégré au cycle de développement</a:t>
             </a:r>
             <a:endParaRPr lang="en-US" sz="1400" dirty="0"/>
           </a:p>
-        </p:txBody>
-      </p:sp>
-      <p:sp>
-        <p:nvSpPr>
-          <p:cNvPr id="8" name="Text 6"/>
-          <p:cNvSpPr/>
-          <p:nvPr/>
-        </p:nvSpPr>
-        <p:spPr>
-          <a:xfrm>
-            <a:off x="640080" y="3200400"/>
-            <a:ext cx="7772400" cy="457200"/>
-          </a:xfrm>
-          <a:prstGeom prst="rect">
-            <a:avLst/>
-          </a:prstGeom>
-          <a:noFill/>
-          <a:ln/>
-        </p:spPr>
-        <p:txBody>
-          <a:bodyPr wrap="square" rtlCol="0" anchor="ctr"/>
-          <a:lstStyle/>
           <a:p>
             <a:pPr marL="342900" indent="-342900">
+              <a:lnSpc>
+                <a:spcPct val="130000"/>
+              </a:lnSpc>
               <a:buSzPct val="100000"/>
               <a:buChar char="•"/>
             </a:pPr>
             <a:r>
               <a:rPr lang="en-US" sz="1400" dirty="0">
                 <a:solidFill>
-                  <a:srgbClr val="334155"/>
+                  <a:srgbClr val="E2E8F0"/>
                 </a:solidFill>
                 <a:latin typeface="Calibri" pitchFamily="34" charset="0"/>
                 <a:ea typeface="Calibri" pitchFamily="34" charset="-122"/>
                 <a:cs typeface="Calibri" pitchFamily="34" charset="-120"/>
               </a:rPr>
-              <a:t>throws Exception : DÉCLARER qu'une méthode peut lancer une exception</a:t>
-            </a:r>
-            <a:endParaRPr lang="en-US" sz="1400" dirty="0"/>
-          </a:p>
-        </p:txBody>
-      </p:sp>
-      <p:sp>
-        <p:nvSpPr>
-          <p:cNvPr id="9" name="Text 7"/>
-          <p:cNvSpPr/>
-          <p:nvPr/>
-        </p:nvSpPr>
-        <p:spPr>
-          <a:xfrm>
-            <a:off x="640080" y="3749040"/>
-            <a:ext cx="7772400" cy="457200"/>
-          </a:xfrm>
-          <a:prstGeom prst="rect">
-            <a:avLst/>
-          </a:prstGeom>
-          <a:noFill/>
-          <a:ln/>
-        </p:spPr>
-        <p:txBody>
-          <a:bodyPr wrap="square" rtlCol="0" anchor="ctr"/>
-          <a:lstStyle/>
-          <a:p>
-            <a:pPr marL="342900" indent="-342900">
-              <a:buSzPct val="100000"/>
-              <a:buChar char="•"/>
-            </a:pPr>
-            <a:r>
-              <a:rPr lang="en-US" sz="1400" dirty="0">
-                <a:solidFill>
-                  <a:srgbClr val="334155"/>
-                </a:solidFill>
-                <a:latin typeface="Calibri" pitchFamily="34" charset="0"/>
-                <a:ea typeface="Calibri" pitchFamily="34" charset="-122"/>
-                <a:cs typeface="Calibri" pitchFamily="34" charset="-120"/>
-              </a:rPr>
-              <a:t>try { ... } catch (Exception e) { ... } finally { ... } : ATTRAPER une exception</a:t>
+              <a:t>Tests = filet de sécurité pour les modifications</a:t>
             </a:r>
             <a:endParaRPr lang="en-US" sz="1400" dirty="0"/>
           </a:p>
@@ -1917,7 +1916,7 @@
     <p:bg>
       <p:bgPr>
         <a:solidFill>
-          <a:srgbClr val="F8FAFC"/>
+          <a:srgbClr val="1A0D00"/>
         </a:solidFill>
       </p:bgPr>
     </p:bg>
@@ -1944,13 +1943,13 @@
         <p:spPr>
           <a:xfrm>
             <a:off x="0" y="0"/>
-            <a:ext cx="109728" cy="5143500"/>
+            <a:ext cx="9144000" cy="54864"/>
           </a:xfrm>
           <a:prstGeom prst="rect">
             <a:avLst/>
           </a:prstGeom>
           <a:solidFill>
-            <a:srgbClr val="DC2626"/>
+            <a:srgbClr val="F97316"/>
           </a:solidFill>
           <a:ln/>
         </p:spPr>
@@ -1963,8 +1962,8 @@
         </p:nvSpPr>
         <p:spPr>
           <a:xfrm>
-            <a:off x="457200" y="274320"/>
-            <a:ext cx="8229600" cy="457200"/>
+            <a:off x="548640" y="274320"/>
+            <a:ext cx="8229600" cy="548640"/>
           </a:xfrm>
           <a:prstGeom prst="rect">
             <a:avLst/>
@@ -1980,50 +1979,164 @@
               <a:buNone/>
             </a:pPr>
             <a:r>
-              <a:rPr lang="en-US" sz="2600" b="1" dirty="0">
-                <a:solidFill>
-                  <a:srgbClr val="1B2A4A"/>
-                </a:solidFill>
-                <a:latin typeface="Trebuchet MS" pitchFamily="34" charset="0"/>
-                <a:ea typeface="Trebuchet MS" pitchFamily="34" charset="-122"/>
-                <a:cs typeface="Trebuchet MS" pitchFamily="34" charset="-120"/>
-              </a:rPr>
-              <a:t>try / catch / finally + throw / throws</a:t>
-            </a:r>
-            <a:endParaRPr lang="en-US" sz="2600" dirty="0"/>
-          </a:p>
-        </p:txBody>
-      </p:sp>
-      <p:sp>
-        <p:nvSpPr>
-          <p:cNvPr id="4" name="Shape 2"/>
+              <a:rPr lang="en-US" sz="2400" b="1" dirty="0">
+                <a:solidFill>
+                  <a:srgbClr val="FFFFFF"/>
+                </a:solidFill>
+                <a:latin typeface="Calibri" pitchFamily="34" charset="0"/>
+                <a:ea typeface="Calibri" pitchFamily="34" charset="-122"/>
+                <a:cs typeface="Calibri" pitchFamily="34" charset="-120"/>
+              </a:rPr>
+              <a:t>Exceptions Java : try-catch-finally</a:t>
+            </a:r>
+            <a:endParaRPr lang="en-US" sz="2400" dirty="0"/>
+          </a:p>
+        </p:txBody>
+      </p:sp>
+      <p:sp>
+        <p:nvSpPr>
+          <p:cNvPr id="4" name="Text 2"/>
           <p:cNvSpPr/>
           <p:nvPr/>
         </p:nvSpPr>
         <p:spPr>
           <a:xfrm>
-            <a:off x="457200" y="822960"/>
-            <a:ext cx="8229600" cy="3840480"/>
+            <a:off x="548640" y="1005840"/>
+            <a:ext cx="3840480" cy="3200400"/>
           </a:xfrm>
           <a:prstGeom prst="rect">
             <a:avLst/>
           </a:prstGeom>
+          <a:noFill/>
+          <a:ln/>
+        </p:spPr>
+        <p:txBody>
+          <a:bodyPr wrap="square" rtlCol="0" anchor="t"/>
+          <a:lstStyle/>
+          <a:p>
+            <a:pPr marL="342900" indent="-342900">
+              <a:buSzPct val="100000"/>
+              <a:buChar char="•"/>
+            </a:pPr>
+            <a:r>
+              <a:rPr lang="en-US" sz="1300" dirty="0">
+                <a:solidFill>
+                  <a:srgbClr val="E2E8F0"/>
+                </a:solidFill>
+                <a:latin typeface="Calibri" pitchFamily="34" charset="0"/>
+                <a:ea typeface="Calibri" pitchFamily="34" charset="-122"/>
+                <a:cs typeface="Calibri" pitchFamily="34" charset="-120"/>
+              </a:rPr>
+              <a:t>try : code qui PEUT lancer une exception</a:t>
+            </a:r>
+            <a:endParaRPr lang="en-US" sz="1300" dirty="0"/>
+          </a:p>
+          <a:p>
+            <a:pPr marL="342900" indent="-342900">
+              <a:buSzPct val="100000"/>
+              <a:buChar char="•"/>
+            </a:pPr>
+            <a:r>
+              <a:rPr lang="en-US" sz="1300" dirty="0">
+                <a:solidFill>
+                  <a:srgbClr val="E2E8F0"/>
+                </a:solidFill>
+                <a:latin typeface="Calibri" pitchFamily="34" charset="0"/>
+                <a:ea typeface="Calibri" pitchFamily="34" charset="-122"/>
+                <a:cs typeface="Calibri" pitchFamily="34" charset="-120"/>
+              </a:rPr>
+              <a:t>catch : ATTRAPER et gérer l'exception</a:t>
+            </a:r>
+            <a:endParaRPr lang="en-US" sz="1300" dirty="0"/>
+          </a:p>
+          <a:p>
+            <a:pPr marL="342900" indent="-342900">
+              <a:buSzPct val="100000"/>
+              <a:buChar char="•"/>
+            </a:pPr>
+            <a:r>
+              <a:rPr lang="en-US" sz="1300" dirty="0">
+                <a:solidFill>
+                  <a:srgbClr val="E2E8F0"/>
+                </a:solidFill>
+                <a:latin typeface="Calibri" pitchFamily="34" charset="0"/>
+                <a:ea typeface="Calibri" pitchFamily="34" charset="-122"/>
+                <a:cs typeface="Calibri" pitchFamily="34" charset="-120"/>
+              </a:rPr>
+              <a:t>finally : s'exécute TOUJOURS (fermer ressources)</a:t>
+            </a:r>
+            <a:endParaRPr lang="en-US" sz="1300" dirty="0"/>
+          </a:p>
+          <a:p>
+            <a:pPr marL="342900" indent="-342900">
+              <a:buSzPct val="100000"/>
+              <a:buChar char="•"/>
+            </a:pPr>
+            <a:r>
+              <a:rPr lang="en-US" sz="1300" dirty="0">
+                <a:solidFill>
+                  <a:srgbClr val="E2E8F0"/>
+                </a:solidFill>
+                <a:latin typeface="Calibri" pitchFamily="34" charset="0"/>
+                <a:ea typeface="Calibri" pitchFamily="34" charset="-122"/>
+                <a:cs typeface="Calibri" pitchFamily="34" charset="-120"/>
+              </a:rPr>
+              <a:t>throw : LANCER une exception manuellement</a:t>
+            </a:r>
+            <a:endParaRPr lang="en-US" sz="1300" dirty="0"/>
+          </a:p>
+          <a:p>
+            <a:pPr marL="342900" indent="-342900">
+              <a:buSzPct val="100000"/>
+              <a:buChar char="•"/>
+            </a:pPr>
+            <a:r>
+              <a:rPr lang="en-US" sz="1300" dirty="0">
+                <a:solidFill>
+                  <a:srgbClr val="E2E8F0"/>
+                </a:solidFill>
+                <a:latin typeface="Calibri" pitchFamily="34" charset="0"/>
+                <a:ea typeface="Calibri" pitchFamily="34" charset="-122"/>
+                <a:cs typeface="Calibri" pitchFamily="34" charset="-120"/>
+              </a:rPr>
+              <a:t>throws : DÉCLARER qu'une méthode peut lancer</a:t>
+            </a:r>
+            <a:endParaRPr lang="en-US" sz="1300" dirty="0"/>
+          </a:p>
+        </p:txBody>
+      </p:sp>
+      <p:sp>
+        <p:nvSpPr>
+          <p:cNvPr id="5" name="Shape 3"/>
+          <p:cNvSpPr/>
+          <p:nvPr/>
+        </p:nvSpPr>
+        <p:spPr>
+          <a:xfrm>
+            <a:off x="4754880" y="1005840"/>
+            <a:ext cx="4023360" cy="3200400"/>
+          </a:xfrm>
+          <a:prstGeom prst="roundRect">
+            <a:avLst>
+              <a:gd name="adj" fmla="val 2857"/>
+            </a:avLst>
+          </a:prstGeom>
           <a:solidFill>
-            <a:srgbClr val="1E293B"/>
+            <a:srgbClr val="0D1117"/>
           </a:solidFill>
           <a:ln/>
         </p:spPr>
       </p:sp>
       <p:sp>
         <p:nvSpPr>
-          <p:cNvPr id="5" name="Text 3"/>
+          <p:cNvPr id="6" name="Text 4"/>
           <p:cNvSpPr/>
           <p:nvPr/>
         </p:nvSpPr>
         <p:spPr>
           <a:xfrm>
-            <a:off x="640080" y="914400"/>
-            <a:ext cx="7863840" cy="3657600"/>
+            <a:off x="4937760" y="1143000"/>
+            <a:ext cx="3657600" cy="2926080"/>
           </a:xfrm>
           <a:prstGeom prst="rect">
             <a:avLst/>
@@ -2032,382 +2145,234 @@
           <a:ln/>
         </p:spPr>
         <p:txBody>
-          <a:bodyPr wrap="square" rtlCol="0" anchor="ctr"/>
-          <a:lstStyle/>
-          <a:p>
-            <a:pPr indent="0" marL="0">
-              <a:buNone/>
-            </a:pPr>
-            <a:r>
-              <a:rPr lang="en-US" sz="1100" dirty="0">
-                <a:solidFill>
-                  <a:srgbClr val="64748B"/>
+          <a:bodyPr wrap="square" rtlCol="0" anchor="t"/>
+          <a:lstStyle/>
+          <a:p>
+            <a:pPr indent="0" marL="0">
+              <a:buNone/>
+            </a:pPr>
+            <a:r>
+              <a:rPr lang="en-US" sz="1000" dirty="0">
+                <a:solidFill>
+                  <a:srgbClr val="A5F3FC"/>
                 </a:solidFill>
                 <a:latin typeface="Consolas" pitchFamily="34" charset="0"/>
                 <a:ea typeface="Consolas" pitchFamily="34" charset="-122"/>
                 <a:cs typeface="Consolas" pitchFamily="34" charset="-120"/>
               </a:rPr>
-              <a:t>// throws : DÉCLARER une exception possible</a:t>
-            </a:r>
-            <a:endParaRPr lang="en-US" sz="1100" dirty="0"/>
-          </a:p>
-          <a:p>
-            <a:pPr indent="0" marL="0">
-              <a:buNone/>
-            </a:pPr>
-            <a:r>
-              <a:rPr lang="en-US" sz="1100" dirty="0">
-                <a:solidFill>
-                  <a:srgbClr val="7C3AED"/>
+              <a:t>try {</a:t>
+            </a:r>
+            <a:endParaRPr lang="en-US" sz="1000" dirty="0"/>
+          </a:p>
+          <a:p>
+            <a:pPr indent="0" marL="0">
+              <a:buNone/>
+            </a:pPr>
+            <a:r>
+              <a:rPr lang="en-US" sz="1000" dirty="0">
+                <a:solidFill>
+                  <a:srgbClr val="A5F3FC"/>
                 </a:solidFill>
                 <a:latin typeface="Consolas" pitchFamily="34" charset="0"/>
                 <a:ea typeface="Consolas" pitchFamily="34" charset="-122"/>
                 <a:cs typeface="Consolas" pitchFamily="34" charset="-120"/>
               </a:rPr>
-              <a:t>public void lireFichier(String nom) throws FileNotFoundException {</a:t>
-            </a:r>
-            <a:endParaRPr lang="en-US" sz="1100" dirty="0"/>
-          </a:p>
-          <a:p>
-            <a:pPr indent="0" marL="0">
-              <a:buNone/>
-            </a:pPr>
-            <a:r>
-              <a:rPr lang="en-US" sz="1100" dirty="0">
-                <a:solidFill>
-                  <a:srgbClr val="E2E8F0"/>
+              <a:t>    int result = 10 / diviseur;</a:t>
+            </a:r>
+            <a:endParaRPr lang="en-US" sz="1000" dirty="0"/>
+          </a:p>
+          <a:p>
+            <a:pPr indent="0" marL="0">
+              <a:buNone/>
+            </a:pPr>
+            <a:r>
+              <a:rPr lang="en-US" sz="1000" dirty="0">
+                <a:solidFill>
+                  <a:srgbClr val="A5F3FC"/>
                 </a:solidFill>
                 <a:latin typeface="Consolas" pitchFamily="34" charset="0"/>
                 <a:ea typeface="Consolas" pitchFamily="34" charset="-122"/>
                 <a:cs typeface="Consolas" pitchFamily="34" charset="-120"/>
               </a:rPr>
-              <a:t>    FileReader fr = new FileReader(nom);</a:t>
-            </a:r>
-            <a:endParaRPr lang="en-US" sz="1100" dirty="0"/>
-          </a:p>
-          <a:p>
-            <a:pPr indent="0" marL="0">
-              <a:buNone/>
-            </a:pPr>
-            <a:r>
-              <a:rPr lang="en-US" sz="1100" dirty="0">
-                <a:solidFill>
-                  <a:srgbClr val="E2E8F0"/>
+              <a:t>} catch (ArithmeticException e) {</a:t>
+            </a:r>
+            <a:endParaRPr lang="en-US" sz="1000" dirty="0"/>
+          </a:p>
+          <a:p>
+            <a:pPr indent="0" marL="0">
+              <a:buNone/>
+            </a:pPr>
+            <a:r>
+              <a:rPr lang="en-US" sz="1000" dirty="0">
+                <a:solidFill>
+                  <a:srgbClr val="A5F3FC"/>
                 </a:solidFill>
                 <a:latin typeface="Consolas" pitchFamily="34" charset="0"/>
                 <a:ea typeface="Consolas" pitchFamily="34" charset="-122"/>
                 <a:cs typeface="Consolas" pitchFamily="34" charset="-120"/>
               </a:rPr>
-              <a:t>}</a:t>
-            </a:r>
-            <a:endParaRPr lang="en-US" sz="1100" dirty="0"/>
-          </a:p>
-          <a:p>
-            <a:pPr indent="0" marL="0">
-              <a:buNone/>
-            </a:pPr>
-            <a:endParaRPr lang="en-US" sz="1100" dirty="0"/>
-          </a:p>
-          <a:p>
-            <a:pPr indent="0" marL="0">
-              <a:buNone/>
-            </a:pPr>
-            <a:r>
-              <a:rPr lang="en-US" sz="1100" dirty="0">
-                <a:solidFill>
-                  <a:srgbClr val="64748B"/>
+              <a:t>    System.out.println("Erreur : " </a:t>
+            </a:r>
+            <a:endParaRPr lang="en-US" sz="1000" dirty="0"/>
+          </a:p>
+          <a:p>
+            <a:pPr indent="0" marL="0">
+              <a:buNone/>
+            </a:pPr>
+            <a:r>
+              <a:rPr lang="en-US" sz="1000" dirty="0">
+                <a:solidFill>
+                  <a:srgbClr val="A5F3FC"/>
                 </a:solidFill>
                 <a:latin typeface="Consolas" pitchFamily="34" charset="0"/>
                 <a:ea typeface="Consolas" pitchFamily="34" charset="-122"/>
                 <a:cs typeface="Consolas" pitchFamily="34" charset="-120"/>
               </a:rPr>
-              <a:t>// throw : LANCER une exception</a:t>
-            </a:r>
-            <a:endParaRPr lang="en-US" sz="1100" dirty="0"/>
-          </a:p>
-          <a:p>
-            <a:pPr indent="0" marL="0">
-              <a:buNone/>
-            </a:pPr>
-            <a:r>
-              <a:rPr lang="en-US" sz="1100" dirty="0">
-                <a:solidFill>
-                  <a:srgbClr val="7C3AED"/>
+              <a:t>        + e.getMessage());</a:t>
+            </a:r>
+            <a:endParaRPr lang="en-US" sz="1000" dirty="0"/>
+          </a:p>
+          <a:p>
+            <a:pPr indent="0" marL="0">
+              <a:buNone/>
+            </a:pPr>
+            <a:r>
+              <a:rPr lang="en-US" sz="1000" dirty="0">
+                <a:solidFill>
+                  <a:srgbClr val="A5F3FC"/>
                 </a:solidFill>
                 <a:latin typeface="Consolas" pitchFamily="34" charset="0"/>
                 <a:ea typeface="Consolas" pitchFamily="34" charset="-122"/>
                 <a:cs typeface="Consolas" pitchFamily="34" charset="-120"/>
               </a:rPr>
-              <a:t>public void setAge(int age) {</a:t>
-            </a:r>
-            <a:endParaRPr lang="en-US" sz="1100" dirty="0"/>
-          </a:p>
-          <a:p>
-            <a:pPr indent="0" marL="0">
-              <a:buNone/>
-            </a:pPr>
-            <a:r>
-              <a:rPr lang="en-US" sz="1100" dirty="0">
-                <a:solidFill>
-                  <a:srgbClr val="E2E8F0"/>
+              <a:t>} finally {</a:t>
+            </a:r>
+            <a:endParaRPr lang="en-US" sz="1000" dirty="0"/>
+          </a:p>
+          <a:p>
+            <a:pPr indent="0" marL="0">
+              <a:buNone/>
+            </a:pPr>
+            <a:r>
+              <a:rPr lang="en-US" sz="1000" dirty="0">
+                <a:solidFill>
+                  <a:srgbClr val="A5F3FC"/>
                 </a:solidFill>
                 <a:latin typeface="Consolas" pitchFamily="34" charset="0"/>
                 <a:ea typeface="Consolas" pitchFamily="34" charset="-122"/>
                 <a:cs typeface="Consolas" pitchFamily="34" charset="-120"/>
               </a:rPr>
-              <a:t>    if (age &lt; 0) {</a:t>
-            </a:r>
-            <a:endParaRPr lang="en-US" sz="1100" dirty="0"/>
-          </a:p>
-          <a:p>
-            <a:pPr indent="0" marL="0">
-              <a:buNone/>
-            </a:pPr>
-            <a:r>
-              <a:rPr lang="en-US" sz="1100" dirty="0">
-                <a:solidFill>
-                  <a:srgbClr val="E2E8F0"/>
+              <a:t>    System.out.println("Fin du calcul");</a:t>
+            </a:r>
+            <a:endParaRPr lang="en-US" sz="1000" dirty="0"/>
+          </a:p>
+          <a:p>
+            <a:pPr indent="0" marL="0">
+              <a:buNone/>
+            </a:pPr>
+            <a:r>
+              <a:rPr lang="en-US" sz="1000" dirty="0">
+                <a:solidFill>
+                  <a:srgbClr val="A5F3FC"/>
                 </a:solidFill>
                 <a:latin typeface="Consolas" pitchFamily="34" charset="0"/>
                 <a:ea typeface="Consolas" pitchFamily="34" charset="-122"/>
                 <a:cs typeface="Consolas" pitchFamily="34" charset="-120"/>
               </a:rPr>
-              <a:t>        throw new IllegalArgumentException("L'âge ne peut pas être négatif");</a:t>
-            </a:r>
-            <a:endParaRPr lang="en-US" sz="1100" dirty="0"/>
-          </a:p>
-          <a:p>
-            <a:pPr indent="0" marL="0">
-              <a:buNone/>
-            </a:pPr>
-            <a:r>
-              <a:rPr lang="en-US" sz="1100" dirty="0">
-                <a:solidFill>
-                  <a:srgbClr val="E2E8F0"/>
+              <a:t>}</a:t>
+            </a:r>
+            <a:endParaRPr lang="en-US" sz="1000" dirty="0"/>
+          </a:p>
+          <a:p>
+            <a:pPr indent="0" marL="0">
+              <a:buNone/>
+            </a:pPr>
+            <a:endParaRPr lang="en-US" sz="1000" dirty="0"/>
+          </a:p>
+          <a:p>
+            <a:pPr indent="0" marL="0">
+              <a:buNone/>
+            </a:pPr>
+            <a:r>
+              <a:rPr lang="en-US" sz="1000" dirty="0">
+                <a:solidFill>
+                  <a:srgbClr val="A5F3FC"/>
                 </a:solidFill>
                 <a:latin typeface="Consolas" pitchFamily="34" charset="0"/>
                 <a:ea typeface="Consolas" pitchFamily="34" charset="-122"/>
                 <a:cs typeface="Consolas" pitchFamily="34" charset="-120"/>
               </a:rPr>
-              <a:t>    }</a:t>
-            </a:r>
-            <a:endParaRPr lang="en-US" sz="1100" dirty="0"/>
-          </a:p>
-          <a:p>
-            <a:pPr indent="0" marL="0">
-              <a:buNone/>
-            </a:pPr>
-            <a:r>
-              <a:rPr lang="en-US" sz="1100" dirty="0">
-                <a:solidFill>
-                  <a:srgbClr val="E2E8F0"/>
+              <a:t>// throw vs throws</a:t>
+            </a:r>
+            <a:endParaRPr lang="en-US" sz="1000" dirty="0"/>
+          </a:p>
+          <a:p>
+            <a:pPr indent="0" marL="0">
+              <a:buNone/>
+            </a:pPr>
+            <a:r>
+              <a:rPr lang="en-US" sz="1000" dirty="0">
+                <a:solidFill>
+                  <a:srgbClr val="A5F3FC"/>
                 </a:solidFill>
                 <a:latin typeface="Consolas" pitchFamily="34" charset="0"/>
                 <a:ea typeface="Consolas" pitchFamily="34" charset="-122"/>
                 <a:cs typeface="Consolas" pitchFamily="34" charset="-120"/>
               </a:rPr>
-              <a:t>    this.age = age;</a:t>
-            </a:r>
-            <a:endParaRPr lang="en-US" sz="1100" dirty="0"/>
-          </a:p>
-          <a:p>
-            <a:pPr indent="0" marL="0">
-              <a:buNone/>
-            </a:pPr>
-            <a:r>
-              <a:rPr lang="en-US" sz="1100" dirty="0">
-                <a:solidFill>
-                  <a:srgbClr val="E2E8F0"/>
+              <a:t>public void pop() throws EmptyException {</a:t>
+            </a:r>
+            <a:endParaRPr lang="en-US" sz="1000" dirty="0"/>
+          </a:p>
+          <a:p>
+            <a:pPr indent="0" marL="0">
+              <a:buNone/>
+            </a:pPr>
+            <a:r>
+              <a:rPr lang="en-US" sz="1000" dirty="0">
+                <a:solidFill>
+                  <a:srgbClr val="A5F3FC"/>
                 </a:solidFill>
                 <a:latin typeface="Consolas" pitchFamily="34" charset="0"/>
                 <a:ea typeface="Consolas" pitchFamily="34" charset="-122"/>
                 <a:cs typeface="Consolas" pitchFamily="34" charset="-120"/>
               </a:rPr>
-              <a:t>}</a:t>
-            </a:r>
-            <a:endParaRPr lang="en-US" sz="1100" dirty="0"/>
-          </a:p>
-          <a:p>
-            <a:pPr indent="0" marL="0">
-              <a:buNone/>
-            </a:pPr>
-            <a:endParaRPr lang="en-US" sz="1100" dirty="0"/>
-          </a:p>
-          <a:p>
-            <a:pPr indent="0" marL="0">
-              <a:buNone/>
-            </a:pPr>
-            <a:r>
-              <a:rPr lang="en-US" sz="1100" dirty="0">
-                <a:solidFill>
-                  <a:srgbClr val="64748B"/>
+              <a:t>    if (isEmpty())</a:t>
+            </a:r>
+            <a:endParaRPr lang="en-US" sz="1000" dirty="0"/>
+          </a:p>
+          <a:p>
+            <a:pPr indent="0" marL="0">
+              <a:buNone/>
+            </a:pPr>
+            <a:r>
+              <a:rPr lang="en-US" sz="1000" dirty="0">
+                <a:solidFill>
+                  <a:srgbClr val="A5F3FC"/>
                 </a:solidFill>
                 <a:latin typeface="Consolas" pitchFamily="34" charset="0"/>
                 <a:ea typeface="Consolas" pitchFamily="34" charset="-122"/>
                 <a:cs typeface="Consolas" pitchFamily="34" charset="-120"/>
               </a:rPr>
-              <a:t>// try-catch-finally : ATTRAPER une exception</a:t>
-            </a:r>
-            <a:endParaRPr lang="en-US" sz="1100" dirty="0"/>
-          </a:p>
-          <a:p>
-            <a:pPr indent="0" marL="0">
-              <a:buNone/>
-            </a:pPr>
-            <a:r>
-              <a:rPr lang="en-US" sz="1100" dirty="0">
-                <a:solidFill>
-                  <a:srgbClr val="E2E8F0"/>
+              <a:t>        throw new EmptyException();</a:t>
+            </a:r>
+            <a:endParaRPr lang="en-US" sz="1000" dirty="0"/>
+          </a:p>
+          <a:p>
+            <a:pPr indent="0" marL="0">
+              <a:buNone/>
+            </a:pPr>
+            <a:r>
+              <a:rPr lang="en-US" sz="1000" dirty="0">
+                <a:solidFill>
+                  <a:srgbClr val="A5F3FC"/>
                 </a:solidFill>
                 <a:latin typeface="Consolas" pitchFamily="34" charset="0"/>
                 <a:ea typeface="Consolas" pitchFamily="34" charset="-122"/>
                 <a:cs typeface="Consolas" pitchFamily="34" charset="-120"/>
               </a:rPr>
-              <a:t>try {</a:t>
-            </a:r>
-            <a:endParaRPr lang="en-US" sz="1100" dirty="0"/>
-          </a:p>
-          <a:p>
-            <a:pPr indent="0" marL="0">
-              <a:buNone/>
-            </a:pPr>
-            <a:r>
-              <a:rPr lang="en-US" sz="1100" dirty="0">
-                <a:solidFill>
-                  <a:srgbClr val="E2E8F0"/>
-                </a:solidFill>
-                <a:latin typeface="Consolas" pitchFamily="34" charset="0"/>
-                <a:ea typeface="Consolas" pitchFamily="34" charset="-122"/>
-                <a:cs typeface="Consolas" pitchFamily="34" charset="-120"/>
-              </a:rPr>
-              <a:t>    int resultat = 10 / 0;     // ArithmeticException !</a:t>
-            </a:r>
-            <a:endParaRPr lang="en-US" sz="1100" dirty="0"/>
-          </a:p>
-          <a:p>
-            <a:pPr indent="0" marL="0">
-              <a:buNone/>
-            </a:pPr>
-            <a:r>
-              <a:rPr lang="en-US" sz="1100" dirty="0">
-                <a:solidFill>
-                  <a:srgbClr val="E2E8F0"/>
-                </a:solidFill>
-                <a:latin typeface="Consolas" pitchFamily="34" charset="0"/>
-                <a:ea typeface="Consolas" pitchFamily="34" charset="-122"/>
-                <a:cs typeface="Consolas" pitchFamily="34" charset="-120"/>
-              </a:rPr>
-              <a:t>} catch (ArithmeticException e) {</a:t>
-            </a:r>
-            <a:endParaRPr lang="en-US" sz="1100" dirty="0"/>
-          </a:p>
-          <a:p>
-            <a:pPr indent="0" marL="0">
-              <a:buNone/>
-            </a:pPr>
-            <a:r>
-              <a:rPr lang="en-US" sz="1100" dirty="0">
-                <a:solidFill>
-                  <a:srgbClr val="E2E8F0"/>
-                </a:solidFill>
-                <a:latin typeface="Consolas" pitchFamily="34" charset="0"/>
-                <a:ea typeface="Consolas" pitchFamily="34" charset="-122"/>
-                <a:cs typeface="Consolas" pitchFamily="34" charset="-120"/>
-              </a:rPr>
-              <a:t>    System.out.println("Erreur : " + e.getMessage());</a:t>
-            </a:r>
-            <a:endParaRPr lang="en-US" sz="1100" dirty="0"/>
-          </a:p>
-          <a:p>
-            <a:pPr indent="0" marL="0">
-              <a:buNone/>
-            </a:pPr>
-            <a:r>
-              <a:rPr lang="en-US" sz="1100" dirty="0">
-                <a:solidFill>
-                  <a:srgbClr val="E2E8F0"/>
-                </a:solidFill>
-                <a:latin typeface="Consolas" pitchFamily="34" charset="0"/>
-                <a:ea typeface="Consolas" pitchFamily="34" charset="-122"/>
-                <a:cs typeface="Consolas" pitchFamily="34" charset="-120"/>
-              </a:rPr>
-              <a:t>} finally {</a:t>
-            </a:r>
-            <a:endParaRPr lang="en-US" sz="1100" dirty="0"/>
-          </a:p>
-          <a:p>
-            <a:pPr indent="0" marL="0">
-              <a:buNone/>
-            </a:pPr>
-            <a:r>
-              <a:rPr lang="en-US" sz="1100" dirty="0">
-                <a:solidFill>
-                  <a:srgbClr val="E2E8F0"/>
-                </a:solidFill>
-                <a:latin typeface="Consolas" pitchFamily="34" charset="0"/>
-                <a:ea typeface="Consolas" pitchFamily="34" charset="-122"/>
-                <a:cs typeface="Consolas" pitchFamily="34" charset="-120"/>
-              </a:rPr>
-              <a:t>    System.out.println("Toujours exécuté !");</a:t>
-            </a:r>
-            <a:endParaRPr lang="en-US" sz="1100" dirty="0"/>
-          </a:p>
-          <a:p>
-            <a:pPr indent="0" marL="0">
-              <a:buNone/>
-            </a:pPr>
-            <a:r>
-              <a:rPr lang="en-US" sz="1100" dirty="0">
-                <a:solidFill>
-                  <a:srgbClr val="64748B"/>
-                </a:solidFill>
-                <a:latin typeface="Consolas" pitchFamily="34" charset="0"/>
-                <a:ea typeface="Consolas" pitchFamily="34" charset="-122"/>
-                <a:cs typeface="Consolas" pitchFamily="34" charset="-120"/>
-              </a:rPr>
-              <a:t>    // Fermer fichiers, connexions...</a:t>
-            </a:r>
-            <a:endParaRPr lang="en-US" sz="1100" dirty="0"/>
-          </a:p>
-          <a:p>
-            <a:pPr indent="0" marL="0">
-              <a:buNone/>
-            </a:pPr>
-            <a:r>
-              <a:rPr lang="en-US" sz="1100" dirty="0">
-                <a:solidFill>
-                  <a:srgbClr val="E2E8F0"/>
-                </a:solidFill>
-                <a:latin typeface="Consolas" pitchFamily="34" charset="0"/>
-                <a:ea typeface="Consolas" pitchFamily="34" charset="-122"/>
-                <a:cs typeface="Consolas" pitchFamily="34" charset="-120"/>
-              </a:rPr>
               <a:t>}</a:t>
             </a:r>
-            <a:endParaRPr lang="en-US" sz="1100" dirty="0"/>
-          </a:p>
-          <a:p>
-            <a:pPr indent="0" marL="0">
-              <a:buNone/>
-            </a:pPr>
-            <a:endParaRPr lang="en-US" sz="1100" dirty="0"/>
-          </a:p>
-          <a:p>
-            <a:pPr indent="0" marL="0">
-              <a:buNone/>
-            </a:pPr>
-            <a:r>
-              <a:rPr lang="en-US" sz="1100" dirty="0">
-                <a:solidFill>
-                  <a:srgbClr val="64748B"/>
-                </a:solidFill>
-                <a:latin typeface="Consolas" pitchFamily="34" charset="0"/>
-                <a:ea typeface="Consolas" pitchFamily="34" charset="-122"/>
-                <a:cs typeface="Consolas" pitchFamily="34" charset="-120"/>
-              </a:rPr>
-              <a:t>// RÈGLE : finally s'exécute TOUJOURS, exception ou pas</a:t>
-            </a:r>
-            <a:endParaRPr lang="en-US" sz="1100" dirty="0"/>
+            <a:endParaRPr lang="en-US" sz="1000" dirty="0"/>
           </a:p>
         </p:txBody>
       </p:sp>
@@ -2425,7 +2390,7 @@
     <p:bg>
       <p:bgPr>
         <a:solidFill>
-          <a:srgbClr val="F8FAFC"/>
+          <a:srgbClr val="1A0D00"/>
         </a:solidFill>
       </p:bgPr>
     </p:bg>
@@ -2452,13 +2417,13 @@
         <p:spPr>
           <a:xfrm>
             <a:off x="0" y="0"/>
-            <a:ext cx="109728" cy="5143500"/>
+            <a:ext cx="9144000" cy="54864"/>
           </a:xfrm>
           <a:prstGeom prst="rect">
             <a:avLst/>
           </a:prstGeom>
           <a:solidFill>
-            <a:srgbClr val="DC2626"/>
+            <a:srgbClr val="F97316"/>
           </a:solidFill>
           <a:ln/>
         </p:spPr>
@@ -2471,8 +2436,8 @@
         </p:nvSpPr>
         <p:spPr>
           <a:xfrm>
-            <a:off x="457200" y="274320"/>
-            <a:ext cx="8229600" cy="457200"/>
+            <a:off x="548640" y="274320"/>
+            <a:ext cx="8229600" cy="548640"/>
           </a:xfrm>
           <a:prstGeom prst="rect">
             <a:avLst/>
@@ -2488,609 +2453,144 @@
               <a:buNone/>
             </a:pPr>
             <a:r>
-              <a:rPr lang="en-US" sz="2600" b="1" dirty="0">
-                <a:solidFill>
-                  <a:srgbClr val="1B2A4A"/>
-                </a:solidFill>
-                <a:latin typeface="Trebuchet MS" pitchFamily="34" charset="0"/>
-                <a:ea typeface="Trebuchet MS" pitchFamily="34" charset="-122"/>
-                <a:cs typeface="Trebuchet MS" pitchFamily="34" charset="-120"/>
-              </a:rPr>
-              <a:t>JUnit 5 : les bases</a:t>
-            </a:r>
-            <a:endParaRPr lang="en-US" sz="2600" dirty="0"/>
-          </a:p>
-        </p:txBody>
-      </p:sp>
-      <p:sp>
-        <p:nvSpPr>
-          <p:cNvPr id="4" name="Shape 2"/>
+              <a:rPr lang="en-US" sz="2400" b="1" dirty="0">
+                <a:solidFill>
+                  <a:srgbClr val="FFFFFF"/>
+                </a:solidFill>
+                <a:latin typeface="Calibri" pitchFamily="34" charset="0"/>
+                <a:ea typeface="Calibri" pitchFamily="34" charset="-122"/>
+                <a:cs typeface="Calibri" pitchFamily="34" charset="-120"/>
+              </a:rPr>
+              <a:t>Checked vs Unchecked Exceptions</a:t>
+            </a:r>
+            <a:endParaRPr lang="en-US" sz="2400" dirty="0"/>
+          </a:p>
+        </p:txBody>
+      </p:sp>
+      <p:sp>
+        <p:nvSpPr>
+          <p:cNvPr id="4" name="Text 2"/>
           <p:cNvSpPr/>
           <p:nvPr/>
         </p:nvSpPr>
         <p:spPr>
           <a:xfrm>
-            <a:off x="457200" y="822960"/>
-            <a:ext cx="8229600" cy="3840480"/>
+            <a:off x="548640" y="1005840"/>
+            <a:ext cx="8046720" cy="3657600"/>
           </a:xfrm>
           <a:prstGeom prst="rect">
             <a:avLst/>
           </a:prstGeom>
-          <a:solidFill>
-            <a:srgbClr val="1E293B"/>
-          </a:solidFill>
-          <a:ln/>
-        </p:spPr>
-      </p:sp>
-      <p:sp>
-        <p:nvSpPr>
-          <p:cNvPr id="5" name="Text 3"/>
-          <p:cNvSpPr/>
-          <p:nvPr/>
-        </p:nvSpPr>
-        <p:spPr>
-          <a:xfrm>
-            <a:off x="640080" y="914400"/>
-            <a:ext cx="7863840" cy="3657600"/>
-          </a:xfrm>
-          <a:prstGeom prst="rect">
-            <a:avLst/>
-          </a:prstGeom>
           <a:noFill/>
           <a:ln/>
         </p:spPr>
         <p:txBody>
-          <a:bodyPr wrap="square" rtlCol="0" anchor="ctr"/>
-          <a:lstStyle/>
-          <a:p>
-            <a:pPr indent="0" marL="0">
-              <a:buNone/>
-            </a:pPr>
-            <a:r>
-              <a:rPr lang="en-US" sz="1100" dirty="0">
+          <a:bodyPr wrap="square" rtlCol="0" anchor="t"/>
+          <a:lstStyle/>
+          <a:p>
+            <a:pPr marL="342900" indent="-342900">
+              <a:lnSpc>
+                <a:spcPct val="130000"/>
+              </a:lnSpc>
+              <a:buSzPct val="100000"/>
+              <a:buChar char="•"/>
+            </a:pPr>
+            <a:r>
+              <a:rPr lang="en-US" sz="1400" dirty="0">
                 <a:solidFill>
                   <a:srgbClr val="E2E8F0"/>
                 </a:solidFill>
-                <a:latin typeface="Consolas" pitchFamily="34" charset="0"/>
-                <a:ea typeface="Consolas" pitchFamily="34" charset="-122"/>
-                <a:cs typeface="Consolas" pitchFamily="34" charset="-120"/>
-              </a:rPr>
-              <a:t>import org.junit.jupiter.api.Test;</a:t>
-            </a:r>
-            <a:endParaRPr lang="en-US" sz="1100" dirty="0"/>
-          </a:p>
-          <a:p>
-            <a:pPr indent="0" marL="0">
-              <a:buNone/>
-            </a:pPr>
-            <a:r>
-              <a:rPr lang="en-US" sz="1100" dirty="0">
+                <a:latin typeface="Calibri" pitchFamily="34" charset="0"/>
+                <a:ea typeface="Calibri" pitchFamily="34" charset="-122"/>
+                <a:cs typeface="Calibri" pitchFamily="34" charset="-120"/>
+              </a:rPr>
+              <a:t>Checked : le compilateur OBLIGE le catch/throws (IOException, FileNotFoundException)</a:t>
+            </a:r>
+            <a:endParaRPr lang="en-US" sz="1400" dirty="0"/>
+          </a:p>
+          <a:p>
+            <a:pPr marL="342900" indent="-342900">
+              <a:lnSpc>
+                <a:spcPct val="130000"/>
+              </a:lnSpc>
+              <a:buSzPct val="100000"/>
+              <a:buChar char="•"/>
+            </a:pPr>
+            <a:r>
+              <a:rPr lang="en-US" sz="1400" dirty="0">
                 <a:solidFill>
                   <a:srgbClr val="E2E8F0"/>
                 </a:solidFill>
-                <a:latin typeface="Consolas" pitchFamily="34" charset="0"/>
-                <a:ea typeface="Consolas" pitchFamily="34" charset="-122"/>
-                <a:cs typeface="Consolas" pitchFamily="34" charset="-120"/>
-              </a:rPr>
-              <a:t>import org.junit.jupiter.api.BeforeEach;</a:t>
-            </a:r>
-            <a:endParaRPr lang="en-US" sz="1100" dirty="0"/>
-          </a:p>
-          <a:p>
-            <a:pPr indent="0" marL="0">
-              <a:buNone/>
-            </a:pPr>
-            <a:r>
-              <a:rPr lang="en-US" sz="1100" dirty="0">
+                <a:latin typeface="Calibri" pitchFamily="34" charset="0"/>
+                <a:ea typeface="Calibri" pitchFamily="34" charset="-122"/>
+                <a:cs typeface="Calibri" pitchFamily="34" charset="-120"/>
+              </a:rPr>
+              <a:t>Unchecked (RuntimeException) : pas obligé de catch (NullPointerException, ArrayIndexOutOfBounds)</a:t>
+            </a:r>
+            <a:endParaRPr lang="en-US" sz="1400" dirty="0"/>
+          </a:p>
+          <a:p>
+            <a:pPr marL="342900" indent="-342900">
+              <a:lnSpc>
+                <a:spcPct val="130000"/>
+              </a:lnSpc>
+              <a:buSzPct val="100000"/>
+              <a:buChar char="•"/>
+            </a:pPr>
+            <a:r>
+              <a:rPr lang="en-US" sz="1400" dirty="0">
                 <a:solidFill>
                   <a:srgbClr val="E2E8F0"/>
                 </a:solidFill>
-                <a:latin typeface="Consolas" pitchFamily="34" charset="0"/>
-                <a:ea typeface="Consolas" pitchFamily="34" charset="-122"/>
-                <a:cs typeface="Consolas" pitchFamily="34" charset="-120"/>
-              </a:rPr>
-              <a:t>import static org.junit.jupiter.api.Assertions.*;</a:t>
-            </a:r>
-            <a:endParaRPr lang="en-US" sz="1100" dirty="0"/>
-          </a:p>
-          <a:p>
-            <a:pPr indent="0" marL="0">
-              <a:buNone/>
-            </a:pPr>
-            <a:endParaRPr lang="en-US" sz="1100" dirty="0"/>
-          </a:p>
-          <a:p>
-            <a:pPr indent="0" marL="0">
-              <a:buNone/>
-            </a:pPr>
-            <a:r>
-              <a:rPr lang="en-US" sz="1100" dirty="0">
-                <a:solidFill>
-                  <a:srgbClr val="7C3AED"/>
-                </a:solidFill>
-                <a:latin typeface="Consolas" pitchFamily="34" charset="0"/>
-                <a:ea typeface="Consolas" pitchFamily="34" charset="-122"/>
-                <a:cs typeface="Consolas" pitchFamily="34" charset="-120"/>
-              </a:rPr>
-              <a:t>class GestionStockTest {</a:t>
-            </a:r>
-            <a:endParaRPr lang="en-US" sz="1100" dirty="0"/>
-          </a:p>
-          <a:p>
-            <a:pPr indent="0" marL="0">
-              <a:buNone/>
-            </a:pPr>
-            <a:r>
-              <a:rPr lang="en-US" sz="1100" dirty="0">
+                <a:latin typeface="Calibri" pitchFamily="34" charset="0"/>
+                <a:ea typeface="Calibri" pitchFamily="34" charset="-122"/>
+                <a:cs typeface="Calibri" pitchFamily="34" charset="-120"/>
+              </a:rPr>
+              <a:t>Règle : Checked pour les erreurs récupérables, Unchecked pour les bugs de programmation</a:t>
+            </a:r>
+            <a:endParaRPr lang="en-US" sz="1400" dirty="0"/>
+          </a:p>
+          <a:p>
+            <a:pPr marL="342900" indent="-342900">
+              <a:lnSpc>
+                <a:spcPct val="130000"/>
+              </a:lnSpc>
+              <a:buSzPct val="100000"/>
+              <a:buChar char="•"/>
+            </a:pPr>
+            <a:r>
+              <a:rPr lang="en-US" sz="1400" dirty="0">
                 <a:solidFill>
                   <a:srgbClr val="E2E8F0"/>
                 </a:solidFill>
-                <a:latin typeface="Consolas" pitchFamily="34" charset="0"/>
-                <a:ea typeface="Consolas" pitchFamily="34" charset="-122"/>
-                <a:cs typeface="Consolas" pitchFamily="34" charset="-120"/>
-              </a:rPr>
-              <a:t>    GestionStock gs;</a:t>
-            </a:r>
-            <a:endParaRPr lang="en-US" sz="1100" dirty="0"/>
-          </a:p>
-          <a:p>
-            <a:pPr indent="0" marL="0">
-              <a:buNone/>
-            </a:pPr>
-            <a:r>
-              <a:rPr lang="en-US" sz="1100" dirty="0">
+                <a:latin typeface="Calibri" pitchFamily="34" charset="0"/>
+                <a:ea typeface="Calibri" pitchFamily="34" charset="-122"/>
+                <a:cs typeface="Calibri" pitchFamily="34" charset="-120"/>
+              </a:rPr>
+              <a:t>throw new IllegalArgumentException() → Unchecked</a:t>
+            </a:r>
+            <a:endParaRPr lang="en-US" sz="1400" dirty="0"/>
+          </a:p>
+          <a:p>
+            <a:pPr marL="342900" indent="-342900">
+              <a:lnSpc>
+                <a:spcPct val="130000"/>
+              </a:lnSpc>
+              <a:buSzPct val="100000"/>
+              <a:buChar char="•"/>
+            </a:pPr>
+            <a:r>
+              <a:rPr lang="en-US" sz="1400" dirty="0">
                 <a:solidFill>
                   <a:srgbClr val="E2E8F0"/>
                 </a:solidFill>
-                <a:latin typeface="Consolas" pitchFamily="34" charset="0"/>
-                <a:ea typeface="Consolas" pitchFamily="34" charset="-122"/>
-                <a:cs typeface="Consolas" pitchFamily="34" charset="-120"/>
-              </a:rPr>
-              <a:t>    </a:t>
-            </a:r>
-            <a:endParaRPr lang="en-US" sz="1100" dirty="0"/>
-          </a:p>
-          <a:p>
-            <a:pPr indent="0" marL="0">
-              <a:buNone/>
-            </a:pPr>
-            <a:r>
-              <a:rPr lang="en-US" sz="1100" dirty="0">
-                <a:solidFill>
-                  <a:srgbClr val="E2E8F0"/>
-                </a:solidFill>
-                <a:latin typeface="Consolas" pitchFamily="34" charset="0"/>
-                <a:ea typeface="Consolas" pitchFamily="34" charset="-122"/>
-                <a:cs typeface="Consolas" pitchFamily="34" charset="-120"/>
-              </a:rPr>
-              <a:t>    @BeforeEach  // Exécuté AVANT chaque test</a:t>
-            </a:r>
-            <a:endParaRPr lang="en-US" sz="1100" dirty="0"/>
-          </a:p>
-          <a:p>
-            <a:pPr indent="0" marL="0">
-              <a:buNone/>
-            </a:pPr>
-            <a:r>
-              <a:rPr lang="en-US" sz="1100" dirty="0">
-                <a:solidFill>
-                  <a:srgbClr val="E2E8F0"/>
-                </a:solidFill>
-                <a:latin typeface="Consolas" pitchFamily="34" charset="0"/>
-                <a:ea typeface="Consolas" pitchFamily="34" charset="-122"/>
-                <a:cs typeface="Consolas" pitchFamily="34" charset="-120"/>
-              </a:rPr>
-              <a:t>    void setup() {</a:t>
-            </a:r>
-            <a:endParaRPr lang="en-US" sz="1100" dirty="0"/>
-          </a:p>
-          <a:p>
-            <a:pPr indent="0" marL="0">
-              <a:buNone/>
-            </a:pPr>
-            <a:r>
-              <a:rPr lang="en-US" sz="1100" dirty="0">
-                <a:solidFill>
-                  <a:srgbClr val="E2E8F0"/>
-                </a:solidFill>
-                <a:latin typeface="Consolas" pitchFamily="34" charset="0"/>
-                <a:ea typeface="Consolas" pitchFamily="34" charset="-122"/>
-                <a:cs typeface="Consolas" pitchFamily="34" charset="-120"/>
-              </a:rPr>
-              <a:t>        gs = new GestionStock();</a:t>
-            </a:r>
-            <a:endParaRPr lang="en-US" sz="1100" dirty="0"/>
-          </a:p>
-          <a:p>
-            <a:pPr indent="0" marL="0">
-              <a:buNone/>
-            </a:pPr>
-            <a:r>
-              <a:rPr lang="en-US" sz="1100" dirty="0">
-                <a:solidFill>
-                  <a:srgbClr val="E2E8F0"/>
-                </a:solidFill>
-                <a:latin typeface="Consolas" pitchFamily="34" charset="0"/>
-                <a:ea typeface="Consolas" pitchFamily="34" charset="-122"/>
-                <a:cs typeface="Consolas" pitchFamily="34" charset="-120"/>
-              </a:rPr>
-              <a:t>    }</a:t>
-            </a:r>
-            <a:endParaRPr lang="en-US" sz="1100" dirty="0"/>
-          </a:p>
-          <a:p>
-            <a:pPr indent="0" marL="0">
-              <a:buNone/>
-            </a:pPr>
-            <a:r>
-              <a:rPr lang="en-US" sz="1100" dirty="0">
-                <a:solidFill>
-                  <a:srgbClr val="E2E8F0"/>
-                </a:solidFill>
-                <a:latin typeface="Consolas" pitchFamily="34" charset="0"/>
-                <a:ea typeface="Consolas" pitchFamily="34" charset="-122"/>
-                <a:cs typeface="Consolas" pitchFamily="34" charset="-120"/>
-              </a:rPr>
-              <a:t>    </a:t>
-            </a:r>
-            <a:endParaRPr lang="en-US" sz="1100" dirty="0"/>
-          </a:p>
-          <a:p>
-            <a:pPr indent="0" marL="0">
-              <a:buNone/>
-            </a:pPr>
-            <a:r>
-              <a:rPr lang="en-US" sz="1100" dirty="0">
-                <a:solidFill>
-                  <a:srgbClr val="E2E8F0"/>
-                </a:solidFill>
-                <a:latin typeface="Consolas" pitchFamily="34" charset="0"/>
-                <a:ea typeface="Consolas" pitchFamily="34" charset="-122"/>
-                <a:cs typeface="Consolas" pitchFamily="34" charset="-120"/>
-              </a:rPr>
-              <a:t>    @Test</a:t>
-            </a:r>
-            <a:endParaRPr lang="en-US" sz="1100" dirty="0"/>
-          </a:p>
-          <a:p>
-            <a:pPr indent="0" marL="0">
-              <a:buNone/>
-            </a:pPr>
-            <a:r>
-              <a:rPr lang="en-US" sz="1100" dirty="0">
-                <a:solidFill>
-                  <a:srgbClr val="E2E8F0"/>
-                </a:solidFill>
-                <a:latin typeface="Consolas" pitchFamily="34" charset="0"/>
-                <a:ea typeface="Consolas" pitchFamily="34" charset="-122"/>
-                <a:cs typeface="Consolas" pitchFamily="34" charset="-120"/>
-              </a:rPr>
-              <a:t>    void testAjouter() {</a:t>
-            </a:r>
-            <a:endParaRPr lang="en-US" sz="1100" dirty="0"/>
-          </a:p>
-          <a:p>
-            <a:pPr indent="0" marL="0">
-              <a:buNone/>
-            </a:pPr>
-            <a:r>
-              <a:rPr lang="en-US" sz="1100" dirty="0">
-                <a:solidFill>
-                  <a:srgbClr val="E2E8F0"/>
-                </a:solidFill>
-                <a:latin typeface="Consolas" pitchFamily="34" charset="0"/>
-                <a:ea typeface="Consolas" pitchFamily="34" charset="-122"/>
-                <a:cs typeface="Consolas" pitchFamily="34" charset="-120"/>
-              </a:rPr>
-              <a:t>        gs.ajouter(new Produit("P1", "Stylo", 2.50));</a:t>
-            </a:r>
-            <a:endParaRPr lang="en-US" sz="1100" dirty="0"/>
-          </a:p>
-          <a:p>
-            <a:pPr indent="0" marL="0">
-              <a:buNone/>
-            </a:pPr>
-            <a:r>
-              <a:rPr lang="en-US" sz="1100" dirty="0">
-                <a:solidFill>
-                  <a:srgbClr val="E2E8F0"/>
-                </a:solidFill>
-                <a:latin typeface="Consolas" pitchFamily="34" charset="0"/>
-                <a:ea typeface="Consolas" pitchFamily="34" charset="-122"/>
-                <a:cs typeface="Consolas" pitchFamily="34" charset="-120"/>
-              </a:rPr>
-              <a:t>        assertEquals(1, gs.getTaille());</a:t>
-            </a:r>
-            <a:endParaRPr lang="en-US" sz="1100" dirty="0"/>
-          </a:p>
-          <a:p>
-            <a:pPr indent="0" marL="0">
-              <a:buNone/>
-            </a:pPr>
-            <a:r>
-              <a:rPr lang="en-US" sz="1100" dirty="0">
-                <a:solidFill>
-                  <a:srgbClr val="E2E8F0"/>
-                </a:solidFill>
-                <a:latin typeface="Consolas" pitchFamily="34" charset="0"/>
-                <a:ea typeface="Consolas" pitchFamily="34" charset="-122"/>
-                <a:cs typeface="Consolas" pitchFamily="34" charset="-120"/>
-              </a:rPr>
-              <a:t>    }</a:t>
-            </a:r>
-            <a:endParaRPr lang="en-US" sz="1100" dirty="0"/>
-          </a:p>
-          <a:p>
-            <a:pPr indent="0" marL="0">
-              <a:buNone/>
-            </a:pPr>
-            <a:r>
-              <a:rPr lang="en-US" sz="1100" dirty="0">
-                <a:solidFill>
-                  <a:srgbClr val="E2E8F0"/>
-                </a:solidFill>
-                <a:latin typeface="Consolas" pitchFamily="34" charset="0"/>
-                <a:ea typeface="Consolas" pitchFamily="34" charset="-122"/>
-                <a:cs typeface="Consolas" pitchFamily="34" charset="-120"/>
-              </a:rPr>
-              <a:t>    </a:t>
-            </a:r>
-            <a:endParaRPr lang="en-US" sz="1100" dirty="0"/>
-          </a:p>
-          <a:p>
-            <a:pPr indent="0" marL="0">
-              <a:buNone/>
-            </a:pPr>
-            <a:r>
-              <a:rPr lang="en-US" sz="1100" dirty="0">
-                <a:solidFill>
-                  <a:srgbClr val="E2E8F0"/>
-                </a:solidFill>
-                <a:latin typeface="Consolas" pitchFamily="34" charset="0"/>
-                <a:ea typeface="Consolas" pitchFamily="34" charset="-122"/>
-                <a:cs typeface="Consolas" pitchFamily="34" charset="-120"/>
-              </a:rPr>
-              <a:t>    @Test</a:t>
-            </a:r>
-            <a:endParaRPr lang="en-US" sz="1100" dirty="0"/>
-          </a:p>
-          <a:p>
-            <a:pPr indent="0" marL="0">
-              <a:buNone/>
-            </a:pPr>
-            <a:r>
-              <a:rPr lang="en-US" sz="1100" dirty="0">
-                <a:solidFill>
-                  <a:srgbClr val="E2E8F0"/>
-                </a:solidFill>
-                <a:latin typeface="Consolas" pitchFamily="34" charset="0"/>
-                <a:ea typeface="Consolas" pitchFamily="34" charset="-122"/>
-                <a:cs typeface="Consolas" pitchFamily="34" charset="-120"/>
-              </a:rPr>
-              <a:t>    void testAjouter_Doublon() {</a:t>
-            </a:r>
-            <a:endParaRPr lang="en-US" sz="1100" dirty="0"/>
-          </a:p>
-          <a:p>
-            <a:pPr indent="0" marL="0">
-              <a:buNone/>
-            </a:pPr>
-            <a:r>
-              <a:rPr lang="en-US" sz="1100" dirty="0">
-                <a:solidFill>
-                  <a:srgbClr val="E2E8F0"/>
-                </a:solidFill>
-                <a:latin typeface="Consolas" pitchFamily="34" charset="0"/>
-                <a:ea typeface="Consolas" pitchFamily="34" charset="-122"/>
-                <a:cs typeface="Consolas" pitchFamily="34" charset="-120"/>
-              </a:rPr>
-              <a:t>        gs.ajouter(new Produit("P1", "Stylo", 2.50));</a:t>
-            </a:r>
-            <a:endParaRPr lang="en-US" sz="1100" dirty="0"/>
-          </a:p>
-          <a:p>
-            <a:pPr indent="0" marL="0">
-              <a:buNone/>
-            </a:pPr>
-            <a:r>
-              <a:rPr lang="en-US" sz="1100" dirty="0">
-                <a:solidFill>
-                  <a:srgbClr val="E2E8F0"/>
-                </a:solidFill>
-                <a:latin typeface="Consolas" pitchFamily="34" charset="0"/>
-                <a:ea typeface="Consolas" pitchFamily="34" charset="-122"/>
-                <a:cs typeface="Consolas" pitchFamily="34" charset="-120"/>
-              </a:rPr>
-              <a:t>        boolean result = gs.ajouter(new Produit("P1", "Stylo", 2.50));</a:t>
-            </a:r>
-            <a:endParaRPr lang="en-US" sz="1100" dirty="0"/>
-          </a:p>
-          <a:p>
-            <a:pPr indent="0" marL="0">
-              <a:buNone/>
-            </a:pPr>
-            <a:r>
-              <a:rPr lang="en-US" sz="1100" dirty="0">
-                <a:solidFill>
-                  <a:srgbClr val="E2E8F0"/>
-                </a:solidFill>
-                <a:latin typeface="Consolas" pitchFamily="34" charset="0"/>
-                <a:ea typeface="Consolas" pitchFamily="34" charset="-122"/>
-                <a:cs typeface="Consolas" pitchFamily="34" charset="-120"/>
-              </a:rPr>
-              <a:t>        assertFalse(result); // doublon rejeté</a:t>
-            </a:r>
-            <a:endParaRPr lang="en-US" sz="1100" dirty="0"/>
-          </a:p>
-          <a:p>
-            <a:pPr indent="0" marL="0">
-              <a:buNone/>
-            </a:pPr>
-            <a:r>
-              <a:rPr lang="en-US" sz="1100" dirty="0">
-                <a:solidFill>
-                  <a:srgbClr val="E2E8F0"/>
-                </a:solidFill>
-                <a:latin typeface="Consolas" pitchFamily="34" charset="0"/>
-                <a:ea typeface="Consolas" pitchFamily="34" charset="-122"/>
-                <a:cs typeface="Consolas" pitchFamily="34" charset="-120"/>
-              </a:rPr>
-              <a:t>    }</a:t>
-            </a:r>
-            <a:endParaRPr lang="en-US" sz="1100" dirty="0"/>
-          </a:p>
-          <a:p>
-            <a:pPr indent="0" marL="0">
-              <a:buNone/>
-            </a:pPr>
-            <a:r>
-              <a:rPr lang="en-US" sz="1100" dirty="0">
-                <a:solidFill>
-                  <a:srgbClr val="E2E8F0"/>
-                </a:solidFill>
-                <a:latin typeface="Consolas" pitchFamily="34" charset="0"/>
-                <a:ea typeface="Consolas" pitchFamily="34" charset="-122"/>
-                <a:cs typeface="Consolas" pitchFamily="34" charset="-120"/>
-              </a:rPr>
-              <a:t>    </a:t>
-            </a:r>
-            <a:endParaRPr lang="en-US" sz="1100" dirty="0"/>
-          </a:p>
-          <a:p>
-            <a:pPr indent="0" marL="0">
-              <a:buNone/>
-            </a:pPr>
-            <a:r>
-              <a:rPr lang="en-US" sz="1100" dirty="0">
-                <a:solidFill>
-                  <a:srgbClr val="E2E8F0"/>
-                </a:solidFill>
-                <a:latin typeface="Consolas" pitchFamily="34" charset="0"/>
-                <a:ea typeface="Consolas" pitchFamily="34" charset="-122"/>
-                <a:cs typeface="Consolas" pitchFamily="34" charset="-120"/>
-              </a:rPr>
-              <a:t>    @Test</a:t>
-            </a:r>
-            <a:endParaRPr lang="en-US" sz="1100" dirty="0"/>
-          </a:p>
-          <a:p>
-            <a:pPr indent="0" marL="0">
-              <a:buNone/>
-            </a:pPr>
-            <a:r>
-              <a:rPr lang="en-US" sz="1100" dirty="0">
-                <a:solidFill>
-                  <a:srgbClr val="E2E8F0"/>
-                </a:solidFill>
-                <a:latin typeface="Consolas" pitchFamily="34" charset="0"/>
-                <a:ea typeface="Consolas" pitchFamily="34" charset="-122"/>
-                <a:cs typeface="Consolas" pitchFamily="34" charset="-120"/>
-              </a:rPr>
-              <a:t>    void testSupprimer_Inexistant() {</a:t>
-            </a:r>
-            <a:endParaRPr lang="en-US" sz="1100" dirty="0"/>
-          </a:p>
-          <a:p>
-            <a:pPr indent="0" marL="0">
-              <a:buNone/>
-            </a:pPr>
-            <a:r>
-              <a:rPr lang="en-US" sz="1100" dirty="0">
-                <a:solidFill>
-                  <a:srgbClr val="64748B"/>
-                </a:solidFill>
-                <a:latin typeface="Consolas" pitchFamily="34" charset="0"/>
-                <a:ea typeface="Consolas" pitchFamily="34" charset="-122"/>
-                <a:cs typeface="Consolas" pitchFamily="34" charset="-120"/>
-              </a:rPr>
-              <a:t>        // assertThrows = vérifier qu'une exception est lancée</a:t>
-            </a:r>
-            <a:endParaRPr lang="en-US" sz="1100" dirty="0"/>
-          </a:p>
-          <a:p>
-            <a:pPr indent="0" marL="0">
-              <a:buNone/>
-            </a:pPr>
-            <a:r>
-              <a:rPr lang="en-US" sz="1100" dirty="0">
-                <a:solidFill>
-                  <a:srgbClr val="7C3AED"/>
-                </a:solidFill>
-                <a:latin typeface="Consolas" pitchFamily="34" charset="0"/>
-                <a:ea typeface="Consolas" pitchFamily="34" charset="-122"/>
-                <a:cs typeface="Consolas" pitchFamily="34" charset="-120"/>
-              </a:rPr>
-              <a:t>        assertThrows(IllegalArgumentException.class, () -&gt; {</a:t>
-            </a:r>
-            <a:endParaRPr lang="en-US" sz="1100" dirty="0"/>
-          </a:p>
-          <a:p>
-            <a:pPr indent="0" marL="0">
-              <a:buNone/>
-            </a:pPr>
-            <a:r>
-              <a:rPr lang="en-US" sz="1100" dirty="0">
-                <a:solidFill>
-                  <a:srgbClr val="E2E8F0"/>
-                </a:solidFill>
-                <a:latin typeface="Consolas" pitchFamily="34" charset="0"/>
-                <a:ea typeface="Consolas" pitchFamily="34" charset="-122"/>
-                <a:cs typeface="Consolas" pitchFamily="34" charset="-120"/>
-              </a:rPr>
-              <a:t>            gs.supprimer("P999");</a:t>
-            </a:r>
-            <a:endParaRPr lang="en-US" sz="1100" dirty="0"/>
-          </a:p>
-          <a:p>
-            <a:pPr indent="0" marL="0">
-              <a:buNone/>
-            </a:pPr>
-            <a:r>
-              <a:rPr lang="en-US" sz="1100" dirty="0">
-                <a:solidFill>
-                  <a:srgbClr val="E2E8F0"/>
-                </a:solidFill>
-                <a:latin typeface="Consolas" pitchFamily="34" charset="0"/>
-                <a:ea typeface="Consolas" pitchFamily="34" charset="-122"/>
-                <a:cs typeface="Consolas" pitchFamily="34" charset="-120"/>
-              </a:rPr>
-              <a:t>        });</a:t>
-            </a:r>
-            <a:endParaRPr lang="en-US" sz="1100" dirty="0"/>
-          </a:p>
-          <a:p>
-            <a:pPr indent="0" marL="0">
-              <a:buNone/>
-            </a:pPr>
-            <a:r>
-              <a:rPr lang="en-US" sz="1100" dirty="0">
-                <a:solidFill>
-                  <a:srgbClr val="E2E8F0"/>
-                </a:solidFill>
-                <a:latin typeface="Consolas" pitchFamily="34" charset="0"/>
-                <a:ea typeface="Consolas" pitchFamily="34" charset="-122"/>
-                <a:cs typeface="Consolas" pitchFamily="34" charset="-120"/>
-              </a:rPr>
-              <a:t>    }</a:t>
-            </a:r>
-            <a:endParaRPr lang="en-US" sz="1100" dirty="0"/>
-          </a:p>
-          <a:p>
-            <a:pPr indent="0" marL="0">
-              <a:buNone/>
-            </a:pPr>
-            <a:r>
-              <a:rPr lang="en-US" sz="1100" dirty="0">
-                <a:solidFill>
-                  <a:srgbClr val="E2E8F0"/>
-                </a:solidFill>
-                <a:latin typeface="Consolas" pitchFamily="34" charset="0"/>
-                <a:ea typeface="Consolas" pitchFamily="34" charset="-122"/>
-                <a:cs typeface="Consolas" pitchFamily="34" charset="-120"/>
-              </a:rPr>
-              <a:t>}</a:t>
-            </a:r>
-            <a:endParaRPr lang="en-US" sz="1100" dirty="0"/>
+                <a:latin typeface="Calibri" pitchFamily="34" charset="0"/>
+                <a:ea typeface="Calibri" pitchFamily="34" charset="-122"/>
+                <a:cs typeface="Calibri" pitchFamily="34" charset="-120"/>
+              </a:rPr>
+              <a:t>throw new IOException() → Checked</a:t>
+            </a:r>
+            <a:endParaRPr lang="en-US" sz="1400" dirty="0"/>
           </a:p>
         </p:txBody>
       </p:sp>
@@ -3108,7 +2608,7 @@
     <p:bg>
       <p:bgPr>
         <a:solidFill>
-          <a:srgbClr val="F8FAFC"/>
+          <a:srgbClr val="1A0D00"/>
         </a:solidFill>
       </p:bgPr>
     </p:bg>
@@ -3135,13 +2635,13 @@
         <p:spPr>
           <a:xfrm>
             <a:off x="0" y="0"/>
-            <a:ext cx="109728" cy="5143500"/>
+            <a:ext cx="9144000" cy="54864"/>
           </a:xfrm>
           <a:prstGeom prst="rect">
             <a:avLst/>
           </a:prstGeom>
           <a:solidFill>
-            <a:srgbClr val="DC2626"/>
+            <a:srgbClr val="F97316"/>
           </a:solidFill>
           <a:ln/>
         </p:spPr>
@@ -3154,7 +2654,7 @@
         </p:nvSpPr>
         <p:spPr>
           <a:xfrm>
-            <a:off x="457200" y="274320"/>
+            <a:off x="548640" y="274320"/>
             <a:ext cx="8229600" cy="548640"/>
           </a:xfrm>
           <a:prstGeom prst="rect">
@@ -3171,17 +2671,17 @@
               <a:buNone/>
             </a:pPr>
             <a:r>
-              <a:rPr lang="en-US" sz="2600" b="1" dirty="0">
-                <a:solidFill>
-                  <a:srgbClr val="1B2A4A"/>
-                </a:solidFill>
-                <a:latin typeface="Trebuchet MS" pitchFamily="34" charset="0"/>
-                <a:ea typeface="Trebuchet MS" pitchFamily="34" charset="-122"/>
-                <a:cs typeface="Trebuchet MS" pitchFamily="34" charset="-120"/>
-              </a:rPr>
-              <a:t>JUnit 5 : assertions principales</a:t>
-            </a:r>
-            <a:endParaRPr lang="en-US" sz="2600" dirty="0"/>
+              <a:rPr lang="en-US" sz="2400" b="1" dirty="0">
+                <a:solidFill>
+                  <a:srgbClr val="FFFFFF"/>
+                </a:solidFill>
+                <a:latin typeface="Calibri" pitchFamily="34" charset="0"/>
+                <a:ea typeface="Calibri" pitchFamily="34" charset="-122"/>
+                <a:cs typeface="Calibri" pitchFamily="34" charset="-120"/>
+              </a:rPr>
+              <a:t>JUnit 5 (Jupiter)</a:t>
+            </a:r>
+            <a:endParaRPr lang="en-US" sz="2400" dirty="0"/>
           </a:p>
         </p:txBody>
       </p:sp>
@@ -3193,8 +2693,8 @@
         </p:nvSpPr>
         <p:spPr>
           <a:xfrm>
-            <a:off x="640080" y="1005840"/>
-            <a:ext cx="7772400" cy="457200"/>
+            <a:off x="548640" y="1005840"/>
+            <a:ext cx="3840480" cy="3200400"/>
           </a:xfrm>
           <a:prstGeom prst="rect">
             <a:avLst/>
@@ -3203,7 +2703,7 @@
           <a:ln/>
         </p:spPr>
         <p:txBody>
-          <a:bodyPr wrap="square" rtlCol="0" anchor="ctr"/>
+          <a:bodyPr wrap="square" rtlCol="0" anchor="t"/>
           <a:lstStyle/>
           <a:p>
             <a:pPr marL="342900" indent="-342900">
@@ -3211,59 +2711,113 @@
               <a:buChar char="•"/>
             </a:pPr>
             <a:r>
-              <a:rPr lang="en-US" sz="1400" dirty="0">
-                <a:solidFill>
-                  <a:srgbClr val="334155"/>
+              <a:rPr lang="en-US" sz="1300" dirty="0">
+                <a:solidFill>
+                  <a:srgbClr val="E2E8F0"/>
                 </a:solidFill>
                 <a:latin typeface="Calibri" pitchFamily="34" charset="0"/>
                 <a:ea typeface="Calibri" pitchFamily="34" charset="-122"/>
                 <a:cs typeface="Calibri" pitchFamily="34" charset="-120"/>
               </a:rPr>
-              <a:t>assertEquals(expected, actual) : vérifie l'égalité</a:t>
-            </a:r>
-            <a:endParaRPr lang="en-US" sz="1400" dirty="0"/>
-          </a:p>
-        </p:txBody>
-      </p:sp>
-      <p:sp>
-        <p:nvSpPr>
-          <p:cNvPr id="5" name="Text 3"/>
-          <p:cNvSpPr/>
-          <p:nvPr/>
-        </p:nvSpPr>
-        <p:spPr>
-          <a:xfrm>
-            <a:off x="640080" y="1554480"/>
-            <a:ext cx="7772400" cy="457200"/>
-          </a:xfrm>
-          <a:prstGeom prst="rect">
-            <a:avLst/>
-          </a:prstGeom>
-          <a:noFill/>
-          <a:ln/>
-        </p:spPr>
-        <p:txBody>
-          <a:bodyPr wrap="square" rtlCol="0" anchor="ctr"/>
-          <a:lstStyle/>
+              <a:t>@Test : marque une méthode de test</a:t>
+            </a:r>
+            <a:endParaRPr lang="en-US" sz="1300" dirty="0"/>
+          </a:p>
           <a:p>
             <a:pPr marL="342900" indent="-342900">
               <a:buSzPct val="100000"/>
               <a:buChar char="•"/>
             </a:pPr>
             <a:r>
-              <a:rPr lang="en-US" sz="1400" dirty="0">
-                <a:solidFill>
-                  <a:srgbClr val="334155"/>
+              <a:rPr lang="en-US" sz="1300" dirty="0">
+                <a:solidFill>
+                  <a:srgbClr val="E2E8F0"/>
                 </a:solidFill>
                 <a:latin typeface="Calibri" pitchFamily="34" charset="0"/>
                 <a:ea typeface="Calibri" pitchFamily="34" charset="-122"/>
                 <a:cs typeface="Calibri" pitchFamily="34" charset="-120"/>
               </a:rPr>
-              <a:t>assertTrue(condition) / assertFalse(condition) : vérifie un booléen</a:t>
-            </a:r>
-            <a:endParaRPr lang="en-US" sz="1400" dirty="0"/>
-          </a:p>
-        </p:txBody>
+              <a:t>@BeforeEach : exécuté AVANT chaque test (setup)</a:t>
+            </a:r>
+            <a:endParaRPr lang="en-US" sz="1300" dirty="0"/>
+          </a:p>
+          <a:p>
+            <a:pPr marL="342900" indent="-342900">
+              <a:buSzPct val="100000"/>
+              <a:buChar char="•"/>
+            </a:pPr>
+            <a:r>
+              <a:rPr lang="en-US" sz="1300" dirty="0">
+                <a:solidFill>
+                  <a:srgbClr val="E2E8F0"/>
+                </a:solidFill>
+                <a:latin typeface="Calibri" pitchFamily="34" charset="0"/>
+                <a:ea typeface="Calibri" pitchFamily="34" charset="-122"/>
+                <a:cs typeface="Calibri" pitchFamily="34" charset="-120"/>
+              </a:rPr>
+              <a:t>assertEquals(expected, actual) : compare avec equals()</a:t>
+            </a:r>
+            <a:endParaRPr lang="en-US" sz="1300" dirty="0"/>
+          </a:p>
+          <a:p>
+            <a:pPr marL="342900" indent="-342900">
+              <a:buSzPct val="100000"/>
+              <a:buChar char="•"/>
+            </a:pPr>
+            <a:r>
+              <a:rPr lang="en-US" sz="1300" dirty="0">
+                <a:solidFill>
+                  <a:srgbClr val="E2E8F0"/>
+                </a:solidFill>
+                <a:latin typeface="Calibri" pitchFamily="34" charset="0"/>
+                <a:ea typeface="Calibri" pitchFamily="34" charset="-122"/>
+                <a:cs typeface="Calibri" pitchFamily="34" charset="-120"/>
+              </a:rPr>
+              <a:t>assertThrows(Exception.class, () -&gt; code) : vérifie qu'une exception est lancée</a:t>
+            </a:r>
+            <a:endParaRPr lang="en-US" sz="1300" dirty="0"/>
+          </a:p>
+          <a:p>
+            <a:pPr marL="342900" indent="-342900">
+              <a:buSzPct val="100000"/>
+              <a:buChar char="•"/>
+            </a:pPr>
+            <a:r>
+              <a:rPr lang="en-US" sz="1300" dirty="0">
+                <a:solidFill>
+                  <a:srgbClr val="E2E8F0"/>
+                </a:solidFill>
+                <a:latin typeface="Calibri" pitchFamily="34" charset="0"/>
+                <a:ea typeface="Calibri" pitchFamily="34" charset="-122"/>
+                <a:cs typeface="Calibri" pitchFamily="34" charset="-120"/>
+              </a:rPr>
+              <a:t>Import : org.junit.jupiter.api.* (PAS junit 4)</a:t>
+            </a:r>
+            <a:endParaRPr lang="en-US" sz="1300" dirty="0"/>
+          </a:p>
+        </p:txBody>
+      </p:sp>
+      <p:sp>
+        <p:nvSpPr>
+          <p:cNvPr id="5" name="Shape 3"/>
+          <p:cNvSpPr/>
+          <p:nvPr/>
+        </p:nvSpPr>
+        <p:spPr>
+          <a:xfrm>
+            <a:off x="4754880" y="1005840"/>
+            <a:ext cx="4023360" cy="3200400"/>
+          </a:xfrm>
+          <a:prstGeom prst="roundRect">
+            <a:avLst>
+              <a:gd name="adj" fmla="val 2857"/>
+            </a:avLst>
+          </a:prstGeom>
+          <a:solidFill>
+            <a:srgbClr val="0D1117"/>
+          </a:solidFill>
+          <a:ln/>
+        </p:spPr>
       </p:sp>
       <p:sp>
         <p:nvSpPr>
@@ -3273,8 +2827,8 @@
         </p:nvSpPr>
         <p:spPr>
           <a:xfrm>
-            <a:off x="640080" y="2103120"/>
-            <a:ext cx="7772400" cy="457200"/>
+            <a:off x="4937760" y="1143000"/>
+            <a:ext cx="3657600" cy="2926080"/>
           </a:xfrm>
           <a:prstGeom prst="rect">
             <a:avLst/>
@@ -3283,145 +2837,291 @@
           <a:ln/>
         </p:spPr>
         <p:txBody>
-          <a:bodyPr wrap="square" rtlCol="0" anchor="ctr"/>
-          <a:lstStyle/>
-          <a:p>
-            <a:pPr marL="342900" indent="-342900">
-              <a:buSzPct val="100000"/>
-              <a:buChar char="•"/>
-            </a:pPr>
-            <a:r>
-              <a:rPr lang="en-US" sz="1400" dirty="0">
-                <a:solidFill>
-                  <a:srgbClr val="334155"/>
-                </a:solidFill>
-                <a:latin typeface="Calibri" pitchFamily="34" charset="0"/>
-                <a:ea typeface="Calibri" pitchFamily="34" charset="-122"/>
-                <a:cs typeface="Calibri" pitchFamily="34" charset="-120"/>
-              </a:rPr>
-              <a:t>assertNull(obj) / assertNotNull(obj) : vérifie null</a:t>
-            </a:r>
-            <a:endParaRPr lang="en-US" sz="1400" dirty="0"/>
-          </a:p>
-        </p:txBody>
-      </p:sp>
-      <p:sp>
-        <p:nvSpPr>
-          <p:cNvPr id="7" name="Text 5"/>
-          <p:cNvSpPr/>
-          <p:nvPr/>
-        </p:nvSpPr>
-        <p:spPr>
-          <a:xfrm>
-            <a:off x="640080" y="2651760"/>
-            <a:ext cx="7772400" cy="457200"/>
-          </a:xfrm>
-          <a:prstGeom prst="rect">
-            <a:avLst/>
-          </a:prstGeom>
-          <a:noFill/>
-          <a:ln/>
-        </p:spPr>
-        <p:txBody>
-          <a:bodyPr wrap="square" rtlCol="0" anchor="ctr"/>
-          <a:lstStyle/>
-          <a:p>
-            <a:pPr marL="342900" indent="-342900">
-              <a:buSzPct val="100000"/>
-              <a:buChar char="•"/>
-            </a:pPr>
-            <a:r>
-              <a:rPr lang="en-US" sz="1400" dirty="0">
-                <a:solidFill>
-                  <a:srgbClr val="334155"/>
-                </a:solidFill>
-                <a:latin typeface="Calibri" pitchFamily="34" charset="0"/>
-                <a:ea typeface="Calibri" pitchFamily="34" charset="-122"/>
-                <a:cs typeface="Calibri" pitchFamily="34" charset="-120"/>
-              </a:rPr>
-              <a:t>assertThrows(ExceptionClass.class, () -&gt; { code }) : vérifie qu'une exception est lancée</a:t>
-            </a:r>
-            <a:endParaRPr lang="en-US" sz="1400" dirty="0"/>
-          </a:p>
-        </p:txBody>
-      </p:sp>
-      <p:sp>
-        <p:nvSpPr>
-          <p:cNvPr id="8" name="Text 6"/>
-          <p:cNvSpPr/>
-          <p:nvPr/>
-        </p:nvSpPr>
-        <p:spPr>
-          <a:xfrm>
-            <a:off x="640080" y="3200400"/>
-            <a:ext cx="7772400" cy="457200"/>
-          </a:xfrm>
-          <a:prstGeom prst="rect">
-            <a:avLst/>
-          </a:prstGeom>
-          <a:noFill/>
-          <a:ln/>
-        </p:spPr>
-        <p:txBody>
-          <a:bodyPr wrap="square" rtlCol="0" anchor="ctr"/>
-          <a:lstStyle/>
-          <a:p>
-            <a:pPr marL="342900" indent="-342900">
-              <a:buSzPct val="100000"/>
-              <a:buChar char="•"/>
-            </a:pPr>
-            <a:r>
-              <a:rPr lang="en-US" sz="1400" dirty="0">
-                <a:solidFill>
-                  <a:srgbClr val="334155"/>
-                </a:solidFill>
-                <a:latin typeface="Calibri" pitchFamily="34" charset="0"/>
-                <a:ea typeface="Calibri" pitchFamily="34" charset="-122"/>
-                <a:cs typeface="Calibri" pitchFamily="34" charset="-120"/>
-              </a:rPr>
-              <a:t>@BeforeEach : exécuté avant CHAQUE test (initialisation)</a:t>
-            </a:r>
-            <a:endParaRPr lang="en-US" sz="1400" dirty="0"/>
-          </a:p>
-        </p:txBody>
-      </p:sp>
-      <p:sp>
-        <p:nvSpPr>
-          <p:cNvPr id="9" name="Text 7"/>
-          <p:cNvSpPr/>
-          <p:nvPr/>
-        </p:nvSpPr>
-        <p:spPr>
-          <a:xfrm>
-            <a:off x="640080" y="3749040"/>
-            <a:ext cx="7772400" cy="457200"/>
-          </a:xfrm>
-          <a:prstGeom prst="rect">
-            <a:avLst/>
-          </a:prstGeom>
-          <a:noFill/>
-          <a:ln/>
-        </p:spPr>
-        <p:txBody>
-          <a:bodyPr wrap="square" rtlCol="0" anchor="ctr"/>
-          <a:lstStyle/>
-          <a:p>
-            <a:pPr marL="342900" indent="-342900">
-              <a:buSzPct val="100000"/>
-              <a:buChar char="•"/>
-            </a:pPr>
-            <a:r>
-              <a:rPr lang="en-US" sz="1400" dirty="0">
-                <a:solidFill>
-                  <a:srgbClr val="334155"/>
-                </a:solidFill>
-                <a:latin typeface="Calibri" pitchFamily="34" charset="0"/>
-                <a:ea typeface="Calibri" pitchFamily="34" charset="-122"/>
-                <a:cs typeface="Calibri" pitchFamily="34" charset="-120"/>
-              </a:rPr>
-              <a:t>@Test : marque une méthode de test — JUnit 5 (Jupiter), PAS JUnit 4 !</a:t>
-            </a:r>
-            <a:endParaRPr lang="en-US" sz="1400" dirty="0"/>
+          <a:bodyPr wrap="square" rtlCol="0" anchor="t"/>
+          <a:lstStyle/>
+          <a:p>
+            <a:pPr indent="0" marL="0">
+              <a:buNone/>
+            </a:pPr>
+            <a:r>
+              <a:rPr lang="en-US" sz="1000" dirty="0">
+                <a:solidFill>
+                  <a:srgbClr val="A5F3FC"/>
+                </a:solidFill>
+                <a:latin typeface="Consolas" pitchFamily="34" charset="0"/>
+                <a:ea typeface="Consolas" pitchFamily="34" charset="-122"/>
+                <a:cs typeface="Consolas" pitchFamily="34" charset="-120"/>
+              </a:rPr>
+              <a:t>@BeforeEach</a:t>
+            </a:r>
+            <a:endParaRPr lang="en-US" sz="1000" dirty="0"/>
+          </a:p>
+          <a:p>
+            <a:pPr indent="0" marL="0">
+              <a:buNone/>
+            </a:pPr>
+            <a:r>
+              <a:rPr lang="en-US" sz="1000" dirty="0">
+                <a:solidFill>
+                  <a:srgbClr val="A5F3FC"/>
+                </a:solidFill>
+                <a:latin typeface="Consolas" pitchFamily="34" charset="0"/>
+                <a:ea typeface="Consolas" pitchFamily="34" charset="-122"/>
+                <a:cs typeface="Consolas" pitchFamily="34" charset="-120"/>
+              </a:rPr>
+              <a:t>void setUp() {</a:t>
+            </a:r>
+            <a:endParaRPr lang="en-US" sz="1000" dirty="0"/>
+          </a:p>
+          <a:p>
+            <a:pPr indent="0" marL="0">
+              <a:buNone/>
+            </a:pPr>
+            <a:r>
+              <a:rPr lang="en-US" sz="1000" dirty="0">
+                <a:solidFill>
+                  <a:srgbClr val="A5F3FC"/>
+                </a:solidFill>
+                <a:latin typeface="Consolas" pitchFamily="34" charset="0"/>
+                <a:ea typeface="Consolas" pitchFamily="34" charset="-122"/>
+                <a:cs typeface="Consolas" pitchFamily="34" charset="-120"/>
+              </a:rPr>
+              <a:t>    gs = new GestionStock();</a:t>
+            </a:r>
+            <a:endParaRPr lang="en-US" sz="1000" dirty="0"/>
+          </a:p>
+          <a:p>
+            <a:pPr indent="0" marL="0">
+              <a:buNone/>
+            </a:pPr>
+            <a:r>
+              <a:rPr lang="en-US" sz="1000" dirty="0">
+                <a:solidFill>
+                  <a:srgbClr val="A5F3FC"/>
+                </a:solidFill>
+                <a:latin typeface="Consolas" pitchFamily="34" charset="0"/>
+                <a:ea typeface="Consolas" pitchFamily="34" charset="-122"/>
+                <a:cs typeface="Consolas" pitchFamily="34" charset="-120"/>
+              </a:rPr>
+              <a:t>}</a:t>
+            </a:r>
+            <a:endParaRPr lang="en-US" sz="1000" dirty="0"/>
+          </a:p>
+          <a:p>
+            <a:pPr indent="0" marL="0">
+              <a:buNone/>
+            </a:pPr>
+            <a:endParaRPr lang="en-US" sz="1000" dirty="0"/>
+          </a:p>
+          <a:p>
+            <a:pPr indent="0" marL="0">
+              <a:buNone/>
+            </a:pPr>
+            <a:r>
+              <a:rPr lang="en-US" sz="1000" dirty="0">
+                <a:solidFill>
+                  <a:srgbClr val="A5F3FC"/>
+                </a:solidFill>
+                <a:latin typeface="Consolas" pitchFamily="34" charset="0"/>
+                <a:ea typeface="Consolas" pitchFamily="34" charset="-122"/>
+                <a:cs typeface="Consolas" pitchFamily="34" charset="-120"/>
+              </a:rPr>
+              <a:t>@Test</a:t>
+            </a:r>
+            <a:endParaRPr lang="en-US" sz="1000" dirty="0"/>
+          </a:p>
+          <a:p>
+            <a:pPr indent="0" marL="0">
+              <a:buNone/>
+            </a:pPr>
+            <a:r>
+              <a:rPr lang="en-US" sz="1000" dirty="0">
+                <a:solidFill>
+                  <a:srgbClr val="A5F3FC"/>
+                </a:solidFill>
+                <a:latin typeface="Consolas" pitchFamily="34" charset="0"/>
+                <a:ea typeface="Consolas" pitchFamily="34" charset="-122"/>
+                <a:cs typeface="Consolas" pitchFamily="34" charset="-120"/>
+              </a:rPr>
+              <a:t>void testAjouter() {</a:t>
+            </a:r>
+            <a:endParaRPr lang="en-US" sz="1000" dirty="0"/>
+          </a:p>
+          <a:p>
+            <a:pPr indent="0" marL="0">
+              <a:buNone/>
+            </a:pPr>
+            <a:r>
+              <a:rPr lang="en-US" sz="1000" dirty="0">
+                <a:solidFill>
+                  <a:srgbClr val="A5F3FC"/>
+                </a:solidFill>
+                <a:latin typeface="Consolas" pitchFamily="34" charset="0"/>
+                <a:ea typeface="Consolas" pitchFamily="34" charset="-122"/>
+                <a:cs typeface="Consolas" pitchFamily="34" charset="-120"/>
+              </a:rPr>
+              <a:t>    gs.ajouter(new Produit("P1", 10));</a:t>
+            </a:r>
+            <a:endParaRPr lang="en-US" sz="1000" dirty="0"/>
+          </a:p>
+          <a:p>
+            <a:pPr indent="0" marL="0">
+              <a:buNone/>
+            </a:pPr>
+            <a:r>
+              <a:rPr lang="en-US" sz="1000" dirty="0">
+                <a:solidFill>
+                  <a:srgbClr val="A5F3FC"/>
+                </a:solidFill>
+                <a:latin typeface="Consolas" pitchFamily="34" charset="0"/>
+                <a:ea typeface="Consolas" pitchFamily="34" charset="-122"/>
+                <a:cs typeface="Consolas" pitchFamily="34" charset="-120"/>
+              </a:rPr>
+              <a:t>    assertEquals(1, gs.getTaille());</a:t>
+            </a:r>
+            <a:endParaRPr lang="en-US" sz="1000" dirty="0"/>
+          </a:p>
+          <a:p>
+            <a:pPr indent="0" marL="0">
+              <a:buNone/>
+            </a:pPr>
+            <a:r>
+              <a:rPr lang="en-US" sz="1000" dirty="0">
+                <a:solidFill>
+                  <a:srgbClr val="A5F3FC"/>
+                </a:solidFill>
+                <a:latin typeface="Consolas" pitchFamily="34" charset="0"/>
+                <a:ea typeface="Consolas" pitchFamily="34" charset="-122"/>
+                <a:cs typeface="Consolas" pitchFamily="34" charset="-120"/>
+              </a:rPr>
+              <a:t>}</a:t>
+            </a:r>
+            <a:endParaRPr lang="en-US" sz="1000" dirty="0"/>
+          </a:p>
+          <a:p>
+            <a:pPr indent="0" marL="0">
+              <a:buNone/>
+            </a:pPr>
+            <a:endParaRPr lang="en-US" sz="1000" dirty="0"/>
+          </a:p>
+          <a:p>
+            <a:pPr indent="0" marL="0">
+              <a:buNone/>
+            </a:pPr>
+            <a:r>
+              <a:rPr lang="en-US" sz="1000" dirty="0">
+                <a:solidFill>
+                  <a:srgbClr val="A5F3FC"/>
+                </a:solidFill>
+                <a:latin typeface="Consolas" pitchFamily="34" charset="0"/>
+                <a:ea typeface="Consolas" pitchFamily="34" charset="-122"/>
+                <a:cs typeface="Consolas" pitchFamily="34" charset="-120"/>
+              </a:rPr>
+              <a:t>@Test</a:t>
+            </a:r>
+            <a:endParaRPr lang="en-US" sz="1000" dirty="0"/>
+          </a:p>
+          <a:p>
+            <a:pPr indent="0" marL="0">
+              <a:buNone/>
+            </a:pPr>
+            <a:r>
+              <a:rPr lang="en-US" sz="1000" dirty="0">
+                <a:solidFill>
+                  <a:srgbClr val="A5F3FC"/>
+                </a:solidFill>
+                <a:latin typeface="Consolas" pitchFamily="34" charset="0"/>
+                <a:ea typeface="Consolas" pitchFamily="34" charset="-122"/>
+                <a:cs typeface="Consolas" pitchFamily="34" charset="-120"/>
+              </a:rPr>
+              <a:t>void testSupprimerVide() {</a:t>
+            </a:r>
+            <a:endParaRPr lang="en-US" sz="1000" dirty="0"/>
+          </a:p>
+          <a:p>
+            <a:pPr indent="0" marL="0">
+              <a:buNone/>
+            </a:pPr>
+            <a:r>
+              <a:rPr lang="en-US" sz="1000" dirty="0">
+                <a:solidFill>
+                  <a:srgbClr val="A5F3FC"/>
+                </a:solidFill>
+                <a:latin typeface="Consolas" pitchFamily="34" charset="0"/>
+                <a:ea typeface="Consolas" pitchFamily="34" charset="-122"/>
+                <a:cs typeface="Consolas" pitchFamily="34" charset="-120"/>
+              </a:rPr>
+              <a:t>    assertThrows(</a:t>
+            </a:r>
+            <a:endParaRPr lang="en-US" sz="1000" dirty="0"/>
+          </a:p>
+          <a:p>
+            <a:pPr indent="0" marL="0">
+              <a:buNone/>
+            </a:pPr>
+            <a:r>
+              <a:rPr lang="en-US" sz="1000" dirty="0">
+                <a:solidFill>
+                  <a:srgbClr val="A5F3FC"/>
+                </a:solidFill>
+                <a:latin typeface="Consolas" pitchFamily="34" charset="0"/>
+                <a:ea typeface="Consolas" pitchFamily="34" charset="-122"/>
+                <a:cs typeface="Consolas" pitchFamily="34" charset="-120"/>
+              </a:rPr>
+              <a:t>        IllegalStateException.class,</a:t>
+            </a:r>
+            <a:endParaRPr lang="en-US" sz="1000" dirty="0"/>
+          </a:p>
+          <a:p>
+            <a:pPr indent="0" marL="0">
+              <a:buNone/>
+            </a:pPr>
+            <a:r>
+              <a:rPr lang="en-US" sz="1000" dirty="0">
+                <a:solidFill>
+                  <a:srgbClr val="A5F3FC"/>
+                </a:solidFill>
+                <a:latin typeface="Consolas" pitchFamily="34" charset="0"/>
+                <a:ea typeface="Consolas" pitchFamily="34" charset="-122"/>
+                <a:cs typeface="Consolas" pitchFamily="34" charset="-120"/>
+              </a:rPr>
+              <a:t>        () -&gt; gs.supprimer("P1")</a:t>
+            </a:r>
+            <a:endParaRPr lang="en-US" sz="1000" dirty="0"/>
+          </a:p>
+          <a:p>
+            <a:pPr indent="0" marL="0">
+              <a:buNone/>
+            </a:pPr>
+            <a:r>
+              <a:rPr lang="en-US" sz="1000" dirty="0">
+                <a:solidFill>
+                  <a:srgbClr val="A5F3FC"/>
+                </a:solidFill>
+                <a:latin typeface="Consolas" pitchFamily="34" charset="0"/>
+                <a:ea typeface="Consolas" pitchFamily="34" charset="-122"/>
+                <a:cs typeface="Consolas" pitchFamily="34" charset="-120"/>
+              </a:rPr>
+              <a:t>    );</a:t>
+            </a:r>
+            <a:endParaRPr lang="en-US" sz="1000" dirty="0"/>
+          </a:p>
+          <a:p>
+            <a:pPr indent="0" marL="0">
+              <a:buNone/>
+            </a:pPr>
+            <a:r>
+              <a:rPr lang="en-US" sz="1000" dirty="0">
+                <a:solidFill>
+                  <a:srgbClr val="A5F3FC"/>
+                </a:solidFill>
+                <a:latin typeface="Consolas" pitchFamily="34" charset="0"/>
+                <a:ea typeface="Consolas" pitchFamily="34" charset="-122"/>
+                <a:cs typeface="Consolas" pitchFamily="34" charset="-120"/>
+              </a:rPr>
+              <a:t>}</a:t>
+            </a:r>
+            <a:endParaRPr lang="en-US" sz="1000" dirty="0"/>
           </a:p>
         </p:txBody>
       </p:sp>
@@ -3439,7 +3139,7 @@
     <p:bg>
       <p:bgPr>
         <a:solidFill>
-          <a:srgbClr val="0F172A"/>
+          <a:srgbClr val="1A0D00"/>
         </a:solidFill>
       </p:bgPr>
     </p:bg>
@@ -3466,13 +3166,13 @@
         <p:spPr>
           <a:xfrm>
             <a:off x="0" y="0"/>
-            <a:ext cx="9144000" cy="73152"/>
+            <a:ext cx="9144000" cy="54864"/>
           </a:xfrm>
           <a:prstGeom prst="rect">
             <a:avLst/>
           </a:prstGeom>
           <a:solidFill>
-            <a:srgbClr val="DC2626"/>
+            <a:srgbClr val="F97316"/>
           </a:solidFill>
           <a:ln/>
         </p:spPr>
@@ -3485,8 +3185,8 @@
         </p:nvSpPr>
         <p:spPr>
           <a:xfrm>
-            <a:off x="457200" y="182880"/>
-            <a:ext cx="7315200" cy="457200"/>
+            <a:off x="548640" y="274320"/>
+            <a:ext cx="8229600" cy="548640"/>
           </a:xfrm>
           <a:prstGeom prst="rect">
             <a:avLst/>
@@ -3495,24 +3195,24 @@
           <a:ln/>
         </p:spPr>
         <p:txBody>
-          <a:bodyPr wrap="square" rtlCol="0" anchor="ctr"/>
-          <a:lstStyle/>
-          <a:p>
-            <a:pPr indent="0" marL="0">
-              <a:buNone/>
-            </a:pPr>
-            <a:r>
-              <a:rPr lang="en-US" sz="2200" b="1" dirty="0">
-                <a:solidFill>
-                  <a:srgbClr val="DC2626"/>
-                </a:solidFill>
-                <a:latin typeface="Trebuchet MS" pitchFamily="34" charset="0"/>
-                <a:ea typeface="Trebuchet MS" pitchFamily="34" charset="-122"/>
-                <a:cs typeface="Trebuchet MS" pitchFamily="34" charset="-120"/>
-              </a:rPr>
-              <a:t>NOTES ENSEIGNANT — Ch.10 P5 Exceptions+JUnit</a:t>
-            </a:r>
-            <a:endParaRPr lang="en-US" sz="2200" dirty="0"/>
+          <a:bodyPr wrap="square" lIns="0" tIns="0" rIns="0" bIns="0" rtlCol="0" anchor="ctr"/>
+          <a:lstStyle/>
+          <a:p>
+            <a:pPr indent="0" marL="0">
+              <a:buNone/>
+            </a:pPr>
+            <a:r>
+              <a:rPr lang="en-US" sz="2400" b="1" dirty="0">
+                <a:solidFill>
+                  <a:srgbClr val="FFFFFF"/>
+                </a:solidFill>
+                <a:latin typeface="Calibri" pitchFamily="34" charset="0"/>
+                <a:ea typeface="Calibri" pitchFamily="34" charset="-122"/>
+                <a:cs typeface="Calibri" pitchFamily="34" charset="-120"/>
+              </a:rPr>
+              <a:t>Pattern Arrange-Act-Assert (AAA)</a:t>
+            </a:r>
+            <a:endParaRPr lang="en-US" sz="2400" dirty="0"/>
           </a:p>
         </p:txBody>
       </p:sp>
@@ -3524,8 +3224,8 @@
         </p:nvSpPr>
         <p:spPr>
           <a:xfrm>
-            <a:off x="457200" y="731520"/>
-            <a:ext cx="8229600" cy="4114800"/>
+            <a:off x="548640" y="1005840"/>
+            <a:ext cx="8046720" cy="3657600"/>
           </a:xfrm>
           <a:prstGeom prst="rect">
             <a:avLst/>
@@ -3534,38 +3234,18 @@
           <a:ln/>
         </p:spPr>
         <p:txBody>
-          <a:bodyPr wrap="square" rtlCol="0" anchor="ctr"/>
-          <a:lstStyle/>
-          <a:p>
-            <a:pPr indent="0" marL="0">
-              <a:buNone/>
-            </a:pPr>
-            <a:r>
-              <a:rPr lang="en-US" sz="1500" b="1" dirty="0">
-                <a:solidFill>
-                  <a:srgbClr val="00A896"/>
-                </a:solidFill>
-                <a:latin typeface="Trebuchet MS" pitchFamily="34" charset="0"/>
-                <a:ea typeface="Trebuchet MS" pitchFamily="34" charset="-122"/>
-                <a:cs typeface="Trebuchet MS" pitchFamily="34" charset="-120"/>
-              </a:rPr>
-              <a:t>Plan de séance :</a:t>
-            </a:r>
-            <a:endParaRPr lang="en-US" sz="1500" dirty="0"/>
-          </a:p>
-          <a:p>
-            <a:pPr indent="0" marL="0">
-              <a:buNone/>
-            </a:pPr>
-            <a:endParaRPr lang="en-US" sz="1500" dirty="0"/>
-          </a:p>
+          <a:bodyPr wrap="square" rtlCol="0" anchor="t"/>
+          <a:lstStyle/>
           <a:p>
             <a:pPr marL="342900" indent="-342900">
+              <a:lnSpc>
+                <a:spcPct val="130000"/>
+              </a:lnSpc>
               <a:buSzPct val="100000"/>
               <a:buChar char="•"/>
             </a:pPr>
             <a:r>
-              <a:rPr lang="en-US" sz="1200" dirty="0">
+              <a:rPr lang="en-US" sz="1400" dirty="0">
                 <a:solidFill>
                   <a:srgbClr val="E2E8F0"/>
                 </a:solidFill>
@@ -3573,17 +3253,20 @@
                 <a:ea typeface="Calibri" pitchFamily="34" charset="-122"/>
                 <a:cs typeface="Calibri" pitchFamily="34" charset="-120"/>
               </a:rPr>
-              <a:t>P1 : Exceptions Java — hiérarchie, throw, throws, try-catch-finally</a:t>
-            </a:r>
-            <a:endParaRPr lang="en-US" sz="1500" dirty="0"/>
+              <a:t>Arrange : préparer les données et l'état initial</a:t>
+            </a:r>
+            <a:endParaRPr lang="en-US" sz="1400" dirty="0"/>
           </a:p>
           <a:p>
             <a:pPr marL="342900" indent="-342900">
+              <a:lnSpc>
+                <a:spcPct val="130000"/>
+              </a:lnSpc>
               <a:buSzPct val="100000"/>
               <a:buChar char="•"/>
             </a:pPr>
             <a:r>
-              <a:rPr lang="en-US" sz="1200" dirty="0">
+              <a:rPr lang="en-US" sz="1400" dirty="0">
                 <a:solidFill>
                   <a:srgbClr val="E2E8F0"/>
                 </a:solidFill>
@@ -3591,17 +3274,20 @@
                 <a:ea typeface="Calibri" pitchFamily="34" charset="-122"/>
                 <a:cs typeface="Calibri" pitchFamily="34" charset="-120"/>
               </a:rPr>
-              <a:t>P2 : Live coding — ajouter des exceptions à un projet existant</a:t>
-            </a:r>
-            <a:endParaRPr lang="en-US" sz="1500" dirty="0"/>
+              <a:t>Act : exécuter l'action à tester</a:t>
+            </a:r>
+            <a:endParaRPr lang="en-US" sz="1400" dirty="0"/>
           </a:p>
           <a:p>
             <a:pPr marL="342900" indent="-342900">
+              <a:lnSpc>
+                <a:spcPct val="130000"/>
+              </a:lnSpc>
               <a:buSzPct val="100000"/>
               <a:buChar char="•"/>
             </a:pPr>
             <a:r>
-              <a:rPr lang="en-US" sz="1200" dirty="0">
+              <a:rPr lang="en-US" sz="1400" dirty="0">
                 <a:solidFill>
                   <a:srgbClr val="E2E8F0"/>
                 </a:solidFill>
@@ -3609,17 +3295,20 @@
                 <a:ea typeface="Calibri" pitchFamily="34" charset="-122"/>
                 <a:cs typeface="Calibri" pitchFamily="34" charset="-120"/>
               </a:rPr>
-              <a:t>P3 : JUnit 5 — annotations, assertions, @BeforeEach. Config Maven.</a:t>
-            </a:r>
-            <a:endParaRPr lang="en-US" sz="1500" dirty="0"/>
+              <a:t>Assert : vérifier le résultat</a:t>
+            </a:r>
+            <a:endParaRPr lang="en-US" sz="1400" dirty="0"/>
           </a:p>
           <a:p>
             <a:pPr marL="342900" indent="-342900">
+              <a:lnSpc>
+                <a:spcPct val="130000"/>
+              </a:lnSpc>
               <a:buSzPct val="100000"/>
               <a:buChar char="•"/>
             </a:pPr>
             <a:r>
-              <a:rPr lang="en-US" sz="1200" dirty="0">
+              <a:rPr lang="en-US" sz="1400" dirty="0">
                 <a:solidFill>
                   <a:srgbClr val="E2E8F0"/>
                 </a:solidFill>
@@ -3627,104 +3316,509 @@
                 <a:ea typeface="Calibri" pitchFamily="34" charset="-122"/>
                 <a:cs typeface="Calibri" pitchFamily="34" charset="-120"/>
               </a:rPr>
-              <a:t>P4 : Mini-jeu (chasseur de bugs) + exercice avec tests JUnit</a:t>
-            </a:r>
-            <a:endParaRPr lang="en-US" sz="1500" dirty="0"/>
-          </a:p>
-          <a:p>
-            <a:pPr indent="0" marL="0">
-              <a:buNone/>
-            </a:pPr>
-            <a:endParaRPr lang="en-US" sz="1500" dirty="0"/>
-          </a:p>
-          <a:p>
-            <a:pPr indent="0" marL="0">
-              <a:buNone/>
-            </a:pPr>
-            <a:r>
-              <a:rPr lang="en-US" sz="1400" b="1" dirty="0">
-                <a:solidFill>
-                  <a:srgbClr val="F97316"/>
+              <a:t>Chaque test doit être INDÉPENDANT (@BeforeEach garantit cela)</a:t>
+            </a:r>
+            <a:endParaRPr lang="en-US" sz="1400" dirty="0"/>
+          </a:p>
+          <a:p>
+            <a:pPr marL="342900" indent="-342900">
+              <a:lnSpc>
+                <a:spcPct val="130000"/>
+              </a:lnSpc>
+              <a:buSzPct val="100000"/>
+              <a:buChar char="•"/>
+            </a:pPr>
+            <a:r>
+              <a:rPr lang="en-US" sz="1400" dirty="0">
+                <a:solidFill>
+                  <a:srgbClr val="E2E8F0"/>
                 </a:solidFill>
                 <a:latin typeface="Calibri" pitchFamily="34" charset="0"/>
                 <a:ea typeface="Calibri" pitchFamily="34" charset="-122"/>
                 <a:cs typeface="Calibri" pitchFamily="34" charset="-120"/>
               </a:rPr>
-              <a:t>Critère P5 — l'étudiant doit :</a:t>
-            </a:r>
-            <a:endParaRPr lang="en-US" sz="1500" dirty="0"/>
-          </a:p>
-          <a:p>
-            <a:pPr marL="342900" indent="-342900">
-              <a:buSzPct val="100000"/>
-              <a:buChar char="•"/>
-            </a:pPr>
-            <a:r>
-              <a:rPr lang="en-US" sz="1200" dirty="0">
-                <a:solidFill>
-                  <a:srgbClr val="E2E8F0"/>
+              <a:t>Nommer clairement : testAjouter_ProduitValide_TailleAugmente</a:t>
+            </a:r>
+            <a:endParaRPr lang="en-US" sz="1400" dirty="0"/>
+          </a:p>
+        </p:txBody>
+      </p:sp>
+    </p:spTree>
+  </p:cSld>
+  <p:clrMapOvr>
+    <a:masterClrMapping/>
+  </p:clrMapOvr>
+</p:sld>
+</file>
+
+<file path=ppt/slides/slide7.xml><?xml version="1.0" encoding="utf-8"?>
+<p:sld xmlns:a="http://schemas.openxmlformats.org/drawingml/2006/main" xmlns:r="http://schemas.openxmlformats.org/officeDocument/2006/relationships" xmlns:p="http://schemas.openxmlformats.org/presentationml/2006/main">
+  <p:cSld name="Slide 7">
+    <p:bg>
+      <p:bgPr>
+        <a:solidFill>
+          <a:srgbClr val="1A0D00"/>
+        </a:solidFill>
+      </p:bgPr>
+    </p:bg>
+    <p:spTree>
+      <p:nvGrpSpPr>
+        <p:cNvPr id="1" name=""/>
+        <p:cNvGrpSpPr/>
+        <p:nvPr/>
+      </p:nvGrpSpPr>
+      <p:grpSpPr>
+        <a:xfrm>
+          <a:off x="0" y="0"/>
+          <a:ext cx="0" cy="0"/>
+          <a:chOff x="0" y="0"/>
+          <a:chExt cx="0" cy="0"/>
+        </a:xfrm>
+      </p:grpSpPr>
+      <p:sp>
+        <p:nvSpPr>
+          <p:cNvPr id="2" name="Text 0"/>
+          <p:cNvSpPr/>
+          <p:nvPr/>
+        </p:nvSpPr>
+        <p:spPr>
+          <a:xfrm>
+            <a:off x="548640" y="274320"/>
+            <a:ext cx="8229600" cy="548640"/>
+          </a:xfrm>
+          <a:prstGeom prst="rect">
+            <a:avLst/>
+          </a:prstGeom>
+          <a:noFill/>
+          <a:ln/>
+        </p:spPr>
+        <p:txBody>
+          <a:bodyPr wrap="square" rtlCol="0" anchor="ctr"/>
+          <a:lstStyle/>
+          <a:p>
+            <a:pPr indent="0" marL="0">
+              <a:buNone/>
+            </a:pPr>
+            <a:r>
+              <a:rPr lang="en-US" sz="2800" b="1" dirty="0">
+                <a:solidFill>
+                  <a:srgbClr val="FFFFFF"/>
                 </a:solidFill>
                 <a:latin typeface="Calibri" pitchFamily="34" charset="0"/>
                 <a:ea typeface="Calibri" pitchFamily="34" charset="-122"/>
                 <a:cs typeface="Calibri" pitchFamily="34" charset="-120"/>
               </a:rPr>
-              <a:t>Utiliser throws, throw, try-catch, try-catch-finally dans le code</a:t>
-            </a:r>
-            <a:endParaRPr lang="en-US" sz="1500" dirty="0"/>
-          </a:p>
-          <a:p>
-            <a:pPr marL="342900" indent="-342900">
-              <a:buSzPct val="100000"/>
-              <a:buChar char="•"/>
-            </a:pPr>
-            <a:r>
-              <a:rPr lang="en-US" sz="1200" dirty="0">
-                <a:solidFill>
-                  <a:srgbClr val="E2E8F0"/>
+              <a:t>Récapitulatif</a:t>
+            </a:r>
+            <a:endParaRPr lang="en-US" sz="2800" dirty="0"/>
+          </a:p>
+        </p:txBody>
+      </p:sp>
+      <p:sp>
+        <p:nvSpPr>
+          <p:cNvPr id="3" name="Shape 1"/>
+          <p:cNvSpPr/>
+          <p:nvPr/>
+        </p:nvSpPr>
+        <p:spPr>
+          <a:xfrm>
+            <a:off x="548640" y="1097280"/>
+            <a:ext cx="2621280" cy="3200400"/>
+          </a:xfrm>
+          <a:prstGeom prst="roundRect">
+            <a:avLst>
+              <a:gd name="adj" fmla="val 3488"/>
+            </a:avLst>
+          </a:prstGeom>
+          <a:solidFill>
+            <a:srgbClr val="2D1A00"/>
+          </a:solidFill>
+          <a:ln/>
+        </p:spPr>
+      </p:sp>
+      <p:sp>
+        <p:nvSpPr>
+          <p:cNvPr id="4" name="Text 2"/>
+          <p:cNvSpPr/>
+          <p:nvPr/>
+        </p:nvSpPr>
+        <p:spPr>
+          <a:xfrm>
+            <a:off x="548640" y="1280160"/>
+            <a:ext cx="2621280" cy="457200"/>
+          </a:xfrm>
+          <a:prstGeom prst="rect">
+            <a:avLst/>
+          </a:prstGeom>
+          <a:noFill/>
+          <a:ln/>
+        </p:spPr>
+        <p:txBody>
+          <a:bodyPr wrap="square" rtlCol="0" anchor="ctr"/>
+          <a:lstStyle/>
+          <a:p>
+            <a:pPr algn="ctr" indent="0" marL="0">
+              <a:buNone/>
+            </a:pPr>
+            <a:r>
+              <a:rPr lang="en-US" sz="2800" dirty="0">
+                <a:solidFill>
+                  <a:srgbClr val="000000"/>
+                </a:solidFill>
+              </a:rPr>
+              <a:t>⚠️</a:t>
+            </a:r>
+            <a:endParaRPr lang="en-US" sz="2800" dirty="0"/>
+          </a:p>
+        </p:txBody>
+      </p:sp>
+      <p:sp>
+        <p:nvSpPr>
+          <p:cNvPr id="5" name="Text 3"/>
+          <p:cNvSpPr/>
+          <p:nvPr/>
+        </p:nvSpPr>
+        <p:spPr>
+          <a:xfrm>
+            <a:off x="685800" y="1828800"/>
+            <a:ext cx="2346960" cy="365760"/>
+          </a:xfrm>
+          <a:prstGeom prst="rect">
+            <a:avLst/>
+          </a:prstGeom>
+          <a:noFill/>
+          <a:ln/>
+        </p:spPr>
+        <p:txBody>
+          <a:bodyPr wrap="square" rtlCol="0" anchor="ctr"/>
+          <a:lstStyle/>
+          <a:p>
+            <a:pPr algn="ctr" indent="0" marL="0">
+              <a:buNone/>
+            </a:pPr>
+            <a:r>
+              <a:rPr lang="en-US" sz="1300" b="1" dirty="0">
+                <a:solidFill>
+                  <a:srgbClr val="F97316"/>
                 </a:solidFill>
                 <a:latin typeface="Calibri" pitchFamily="34" charset="0"/>
                 <a:ea typeface="Calibri" pitchFamily="34" charset="-122"/>
                 <a:cs typeface="Calibri" pitchFamily="34" charset="-120"/>
               </a:rPr>
-              <a:t>Écrire des tests JUnit 5 avec @Test, @BeforeEach, assertEquals, assertThrows</a:t>
-            </a:r>
-            <a:endParaRPr lang="en-US" sz="1500" dirty="0"/>
-          </a:p>
-          <a:p>
-            <a:pPr marL="342900" indent="-342900">
-              <a:buSzPct val="100000"/>
-              <a:buChar char="•"/>
-            </a:pPr>
-            <a:r>
-              <a:rPr lang="en-US" sz="1200" dirty="0">
-                <a:solidFill>
-                  <a:srgbClr val="E2E8F0"/>
+              <a:t>Exceptions</a:t>
+            </a:r>
+            <a:endParaRPr lang="en-US" sz="1300" dirty="0"/>
+          </a:p>
+        </p:txBody>
+      </p:sp>
+      <p:sp>
+        <p:nvSpPr>
+          <p:cNvPr id="6" name="Text 4"/>
+          <p:cNvSpPr/>
+          <p:nvPr/>
+        </p:nvSpPr>
+        <p:spPr>
+          <a:xfrm>
+            <a:off x="685800" y="2286000"/>
+            <a:ext cx="2346960" cy="1828800"/>
+          </a:xfrm>
+          <a:prstGeom prst="rect">
+            <a:avLst/>
+          </a:prstGeom>
+          <a:noFill/>
+          <a:ln/>
+        </p:spPr>
+        <p:txBody>
+          <a:bodyPr wrap="square" rtlCol="0" anchor="t"/>
+          <a:lstStyle/>
+          <a:p>
+            <a:pPr algn="ctr" indent="0" marL="0">
+              <a:buNone/>
+            </a:pPr>
+            <a:r>
+              <a:rPr lang="en-US" sz="1100" dirty="0">
+                <a:solidFill>
+                  <a:srgbClr val="94A3B8"/>
                 </a:solidFill>
                 <a:latin typeface="Calibri" pitchFamily="34" charset="0"/>
                 <a:ea typeface="Calibri" pitchFamily="34" charset="-122"/>
                 <a:cs typeface="Calibri" pitchFamily="34" charset="-120"/>
               </a:rPr>
-              <a:t>Rapporter les résultats des tests (combien passent, lesquels échouent)</a:t>
-            </a:r>
-            <a:endParaRPr lang="en-US" sz="1500" dirty="0"/>
-          </a:p>
-          <a:p>
-            <a:pPr marL="342900" indent="-342900">
-              <a:buSzPct val="100000"/>
-              <a:buChar char="•"/>
-            </a:pPr>
-            <a:r>
-              <a:rPr lang="en-US" sz="1200" dirty="0">
-                <a:solidFill>
-                  <a:srgbClr val="E2E8F0"/>
+              <a:t>try-catch-finally, throw/throws, checked/unchecked</a:t>
+            </a:r>
+            <a:endParaRPr lang="en-US" sz="1100" dirty="0"/>
+          </a:p>
+        </p:txBody>
+      </p:sp>
+      <p:sp>
+        <p:nvSpPr>
+          <p:cNvPr id="7" name="Shape 5"/>
+          <p:cNvSpPr/>
+          <p:nvPr/>
+        </p:nvSpPr>
+        <p:spPr>
+          <a:xfrm>
+            <a:off x="3352800" y="1097280"/>
+            <a:ext cx="2621280" cy="3200400"/>
+          </a:xfrm>
+          <a:prstGeom prst="roundRect">
+            <a:avLst>
+              <a:gd name="adj" fmla="val 3488"/>
+            </a:avLst>
+          </a:prstGeom>
+          <a:solidFill>
+            <a:srgbClr val="2D1A00"/>
+          </a:solidFill>
+          <a:ln/>
+        </p:spPr>
+      </p:sp>
+      <p:sp>
+        <p:nvSpPr>
+          <p:cNvPr id="8" name="Text 6"/>
+          <p:cNvSpPr/>
+          <p:nvPr/>
+        </p:nvSpPr>
+        <p:spPr>
+          <a:xfrm>
+            <a:off x="3352800" y="1280160"/>
+            <a:ext cx="2621280" cy="457200"/>
+          </a:xfrm>
+          <a:prstGeom prst="rect">
+            <a:avLst/>
+          </a:prstGeom>
+          <a:noFill/>
+          <a:ln/>
+        </p:spPr>
+        <p:txBody>
+          <a:bodyPr wrap="square" rtlCol="0" anchor="ctr"/>
+          <a:lstStyle/>
+          <a:p>
+            <a:pPr algn="ctr" indent="0" marL="0">
+              <a:buNone/>
+            </a:pPr>
+            <a:r>
+              <a:rPr lang="en-US" sz="2800" dirty="0">
+                <a:solidFill>
+                  <a:srgbClr val="000000"/>
+                </a:solidFill>
+              </a:rPr>
+              <a:t>🧪</a:t>
+            </a:r>
+            <a:endParaRPr lang="en-US" sz="2800" dirty="0"/>
+          </a:p>
+        </p:txBody>
+      </p:sp>
+      <p:sp>
+        <p:nvSpPr>
+          <p:cNvPr id="9" name="Text 7"/>
+          <p:cNvSpPr/>
+          <p:nvPr/>
+        </p:nvSpPr>
+        <p:spPr>
+          <a:xfrm>
+            <a:off x="3489960" y="1828800"/>
+            <a:ext cx="2346960" cy="365760"/>
+          </a:xfrm>
+          <a:prstGeom prst="rect">
+            <a:avLst/>
+          </a:prstGeom>
+          <a:noFill/>
+          <a:ln/>
+        </p:spPr>
+        <p:txBody>
+          <a:bodyPr wrap="square" rtlCol="0" anchor="ctr"/>
+          <a:lstStyle/>
+          <a:p>
+            <a:pPr algn="ctr" indent="0" marL="0">
+              <a:buNone/>
+            </a:pPr>
+            <a:r>
+              <a:rPr lang="en-US" sz="1300" b="1" dirty="0">
+                <a:solidFill>
+                  <a:srgbClr val="F97316"/>
                 </a:solidFill>
                 <a:latin typeface="Calibri" pitchFamily="34" charset="0"/>
                 <a:ea typeface="Calibri" pitchFamily="34" charset="-122"/>
                 <a:cs typeface="Calibri" pitchFamily="34" charset="-120"/>
               </a:rPr>
-              <a:t>ATTENTION : JUnit 5 Jupiter, PAS JUnit 4 (imports différents !)</a:t>
-            </a:r>
-            <a:endParaRPr lang="en-US" sz="1500" dirty="0"/>
+              <a:t>JUnit 5</a:t>
+            </a:r>
+            <a:endParaRPr lang="en-US" sz="1300" dirty="0"/>
+          </a:p>
+        </p:txBody>
+      </p:sp>
+      <p:sp>
+        <p:nvSpPr>
+          <p:cNvPr id="10" name="Text 8"/>
+          <p:cNvSpPr/>
+          <p:nvPr/>
+        </p:nvSpPr>
+        <p:spPr>
+          <a:xfrm>
+            <a:off x="3489960" y="2286000"/>
+            <a:ext cx="2346960" cy="1828800"/>
+          </a:xfrm>
+          <a:prstGeom prst="rect">
+            <a:avLst/>
+          </a:prstGeom>
+          <a:noFill/>
+          <a:ln/>
+        </p:spPr>
+        <p:txBody>
+          <a:bodyPr wrap="square" rtlCol="0" anchor="t"/>
+          <a:lstStyle/>
+          <a:p>
+            <a:pPr algn="ctr" indent="0" marL="0">
+              <a:buNone/>
+            </a:pPr>
+            <a:r>
+              <a:rPr lang="en-US" sz="1100" dirty="0">
+                <a:solidFill>
+                  <a:srgbClr val="94A3B8"/>
+                </a:solidFill>
+                <a:latin typeface="Calibri" pitchFamily="34" charset="0"/>
+                <a:ea typeface="Calibri" pitchFamily="34" charset="-122"/>
+                <a:cs typeface="Calibri" pitchFamily="34" charset="-120"/>
+              </a:rPr>
+              <a:t>@Test, @BeforeEach, assertEquals, assertThrows</a:t>
+            </a:r>
+            <a:endParaRPr lang="en-US" sz="1100" dirty="0"/>
+          </a:p>
+        </p:txBody>
+      </p:sp>
+      <p:sp>
+        <p:nvSpPr>
+          <p:cNvPr id="11" name="Shape 9"/>
+          <p:cNvSpPr/>
+          <p:nvPr/>
+        </p:nvSpPr>
+        <p:spPr>
+          <a:xfrm>
+            <a:off x="6156960" y="1097280"/>
+            <a:ext cx="2621280" cy="3200400"/>
+          </a:xfrm>
+          <a:prstGeom prst="roundRect">
+            <a:avLst>
+              <a:gd name="adj" fmla="val 3488"/>
+            </a:avLst>
+          </a:prstGeom>
+          <a:solidFill>
+            <a:srgbClr val="2D1A00"/>
+          </a:solidFill>
+          <a:ln/>
+        </p:spPr>
+      </p:sp>
+      <p:sp>
+        <p:nvSpPr>
+          <p:cNvPr id="12" name="Text 10"/>
+          <p:cNvSpPr/>
+          <p:nvPr/>
+        </p:nvSpPr>
+        <p:spPr>
+          <a:xfrm>
+            <a:off x="6156960" y="1280160"/>
+            <a:ext cx="2621280" cy="457200"/>
+          </a:xfrm>
+          <a:prstGeom prst="rect">
+            <a:avLst/>
+          </a:prstGeom>
+          <a:noFill/>
+          <a:ln/>
+        </p:spPr>
+        <p:txBody>
+          <a:bodyPr wrap="square" rtlCol="0" anchor="ctr"/>
+          <a:lstStyle/>
+          <a:p>
+            <a:pPr algn="ctr" indent="0" marL="0">
+              <a:buNone/>
+            </a:pPr>
+            <a:r>
+              <a:rPr lang="en-US" sz="2800" dirty="0">
+                <a:solidFill>
+                  <a:srgbClr val="000000"/>
+                </a:solidFill>
+              </a:rPr>
+              <a:t>📐</a:t>
+            </a:r>
+            <a:endParaRPr lang="en-US" sz="2800" dirty="0"/>
+          </a:p>
+        </p:txBody>
+      </p:sp>
+      <p:sp>
+        <p:nvSpPr>
+          <p:cNvPr id="13" name="Text 11"/>
+          <p:cNvSpPr/>
+          <p:nvPr/>
+        </p:nvSpPr>
+        <p:spPr>
+          <a:xfrm>
+            <a:off x="6294120" y="1828800"/>
+            <a:ext cx="2346960" cy="365760"/>
+          </a:xfrm>
+          <a:prstGeom prst="rect">
+            <a:avLst/>
+          </a:prstGeom>
+          <a:noFill/>
+          <a:ln/>
+        </p:spPr>
+        <p:txBody>
+          <a:bodyPr wrap="square" rtlCol="0" anchor="ctr"/>
+          <a:lstStyle/>
+          <a:p>
+            <a:pPr algn="ctr" indent="0" marL="0">
+              <a:buNone/>
+            </a:pPr>
+            <a:r>
+              <a:rPr lang="en-US" sz="1300" b="1" dirty="0">
+                <a:solidFill>
+                  <a:srgbClr val="F97316"/>
+                </a:solidFill>
+                <a:latin typeface="Calibri" pitchFamily="34" charset="0"/>
+                <a:ea typeface="Calibri" pitchFamily="34" charset="-122"/>
+                <a:cs typeface="Calibri" pitchFamily="34" charset="-120"/>
+              </a:rPr>
+              <a:t>AAA</a:t>
+            </a:r>
+            <a:endParaRPr lang="en-US" sz="1300" dirty="0"/>
+          </a:p>
+        </p:txBody>
+      </p:sp>
+      <p:sp>
+        <p:nvSpPr>
+          <p:cNvPr id="14" name="Text 12"/>
+          <p:cNvSpPr/>
+          <p:nvPr/>
+        </p:nvSpPr>
+        <p:spPr>
+          <a:xfrm>
+            <a:off x="6294120" y="2286000"/>
+            <a:ext cx="2346960" cy="1828800"/>
+          </a:xfrm>
+          <a:prstGeom prst="rect">
+            <a:avLst/>
+          </a:prstGeom>
+          <a:noFill/>
+          <a:ln/>
+        </p:spPr>
+        <p:txBody>
+          <a:bodyPr wrap="square" rtlCol="0" anchor="t"/>
+          <a:lstStyle/>
+          <a:p>
+            <a:pPr algn="ctr" indent="0" marL="0">
+              <a:buNone/>
+            </a:pPr>
+            <a:r>
+              <a:rPr lang="en-US" sz="1100" dirty="0">
+                <a:solidFill>
+                  <a:srgbClr val="94A3B8"/>
+                </a:solidFill>
+                <a:latin typeface="Calibri" pitchFamily="34" charset="0"/>
+                <a:ea typeface="Calibri" pitchFamily="34" charset="-122"/>
+                <a:cs typeface="Calibri" pitchFamily="34" charset="-120"/>
+              </a:rPr>
+              <a:t>Arrange → Act → Assert</a:t>
+            </a:r>
+            <a:endParaRPr lang="en-US" sz="1100" dirty="0"/>
           </a:p>
         </p:txBody>
       </p:sp>
